--- a/docs/pptx/entire/ritu-entire-linsubhr-disc-anyhosp.pptx
+++ b/docs/pptx/entire/ritu-entire-linsubhr-disc-anyhosp.pptx
@@ -3045,612 +3045,612 @@
           </p:nvSpPr>
           <p:spPr>
             <a:xfrm>
-              <a:off x="1172049" y="3535429"/>
-              <a:ext cx="7090630" cy="1484756"/>
+              <a:off x="1172049" y="3517088"/>
+              <a:ext cx="7090630" cy="1505457"/>
             </a:xfrm>
             <a:custGeom>
               <a:avLst/>
               <a:pathLst>
-                <a:path w="7090630" h="1484756">
+                <a:path w="7090630" h="1505457">
                   <a:moveTo>
                     <a:pt x="0" y="0"/>
                   </a:moveTo>
                   <a:lnTo>
-                    <a:pt x="71622" y="26892"/>
-                  </a:lnTo>
-                  <a:lnTo>
-                    <a:pt x="143245" y="53426"/>
-                  </a:lnTo>
-                  <a:lnTo>
-                    <a:pt x="214867" y="79608"/>
-                  </a:lnTo>
-                  <a:lnTo>
-                    <a:pt x="286490" y="105441"/>
-                  </a:lnTo>
-                  <a:lnTo>
-                    <a:pt x="358112" y="130931"/>
-                  </a:lnTo>
-                  <a:lnTo>
-                    <a:pt x="429735" y="156082"/>
-                  </a:lnTo>
-                  <a:lnTo>
-                    <a:pt x="501357" y="180898"/>
-                  </a:lnTo>
-                  <a:lnTo>
-                    <a:pt x="572980" y="205384"/>
-                  </a:lnTo>
-                  <a:lnTo>
-                    <a:pt x="644602" y="229545"/>
-                  </a:lnTo>
-                  <a:lnTo>
-                    <a:pt x="716225" y="253384"/>
-                  </a:lnTo>
-                  <a:lnTo>
-                    <a:pt x="787847" y="276906"/>
-                  </a:lnTo>
-                  <a:lnTo>
-                    <a:pt x="859470" y="300115"/>
-                  </a:lnTo>
-                  <a:lnTo>
-                    <a:pt x="931092" y="323015"/>
-                  </a:lnTo>
-                  <a:lnTo>
-                    <a:pt x="1002715" y="345611"/>
-                  </a:lnTo>
-                  <a:lnTo>
-                    <a:pt x="1074337" y="367906"/>
-                  </a:lnTo>
-                  <a:lnTo>
-                    <a:pt x="1145960" y="389905"/>
-                  </a:lnTo>
-                  <a:lnTo>
-                    <a:pt x="1217582" y="411611"/>
-                  </a:lnTo>
-                  <a:lnTo>
-                    <a:pt x="1289205" y="433028"/>
-                  </a:lnTo>
-                  <a:lnTo>
-                    <a:pt x="1360827" y="454161"/>
-                  </a:lnTo>
-                  <a:lnTo>
-                    <a:pt x="1432450" y="475012"/>
-                  </a:lnTo>
-                  <a:lnTo>
-                    <a:pt x="1504073" y="495586"/>
-                  </a:lnTo>
-                  <a:lnTo>
-                    <a:pt x="1575695" y="515887"/>
-                  </a:lnTo>
-                  <a:lnTo>
-                    <a:pt x="1647318" y="535917"/>
-                  </a:lnTo>
-                  <a:lnTo>
-                    <a:pt x="1718940" y="555681"/>
-                  </a:lnTo>
-                  <a:lnTo>
-                    <a:pt x="1790563" y="575182"/>
-                  </a:lnTo>
-                  <a:lnTo>
-                    <a:pt x="1862185" y="594424"/>
-                  </a:lnTo>
-                  <a:lnTo>
-                    <a:pt x="1933808" y="613410"/>
-                  </a:lnTo>
-                  <a:lnTo>
-                    <a:pt x="2005430" y="632143"/>
-                  </a:lnTo>
-                  <a:lnTo>
-                    <a:pt x="2077053" y="650627"/>
-                  </a:lnTo>
-                  <a:lnTo>
-                    <a:pt x="2148675" y="668866"/>
-                  </a:lnTo>
-                  <a:lnTo>
-                    <a:pt x="2220298" y="686861"/>
-                  </a:lnTo>
-                  <a:lnTo>
-                    <a:pt x="2291920" y="704618"/>
-                  </a:lnTo>
-                  <a:lnTo>
-                    <a:pt x="2363543" y="722138"/>
-                  </a:lnTo>
-                  <a:lnTo>
-                    <a:pt x="2435165" y="739425"/>
-                  </a:lnTo>
-                  <a:lnTo>
-                    <a:pt x="2506788" y="756482"/>
-                  </a:lnTo>
-                  <a:lnTo>
-                    <a:pt x="2578410" y="773312"/>
-                  </a:lnTo>
-                  <a:lnTo>
-                    <a:pt x="2650033" y="789919"/>
-                  </a:lnTo>
-                  <a:lnTo>
-                    <a:pt x="2721655" y="806304"/>
-                  </a:lnTo>
-                  <a:lnTo>
-                    <a:pt x="2793278" y="822472"/>
-                  </a:lnTo>
-                  <a:lnTo>
-                    <a:pt x="2864901" y="838424"/>
-                  </a:lnTo>
-                  <a:lnTo>
-                    <a:pt x="2936523" y="854165"/>
-                  </a:lnTo>
-                  <a:lnTo>
-                    <a:pt x="3008146" y="869696"/>
-                  </a:lnTo>
-                  <a:lnTo>
-                    <a:pt x="3079768" y="885020"/>
-                  </a:lnTo>
-                  <a:lnTo>
-                    <a:pt x="3151391" y="900141"/>
-                  </a:lnTo>
-                  <a:lnTo>
-                    <a:pt x="3223013" y="915060"/>
-                  </a:lnTo>
-                  <a:lnTo>
-                    <a:pt x="3294636" y="929781"/>
-                  </a:lnTo>
-                  <a:lnTo>
-                    <a:pt x="3366258" y="944306"/>
-                  </a:lnTo>
-                  <a:lnTo>
-                    <a:pt x="3437881" y="958638"/>
-                  </a:lnTo>
-                  <a:lnTo>
-                    <a:pt x="3509503" y="972780"/>
-                  </a:lnTo>
-                  <a:lnTo>
-                    <a:pt x="3581126" y="986733"/>
-                  </a:lnTo>
-                  <a:lnTo>
-                    <a:pt x="3652748" y="1000501"/>
-                  </a:lnTo>
-                  <a:lnTo>
-                    <a:pt x="3724371" y="1014085"/>
-                  </a:lnTo>
-                  <a:lnTo>
-                    <a:pt x="3795993" y="1027489"/>
-                  </a:lnTo>
-                  <a:lnTo>
-                    <a:pt x="3867616" y="1040715"/>
-                  </a:lnTo>
-                  <a:lnTo>
-                    <a:pt x="3939238" y="1053764"/>
-                  </a:lnTo>
-                  <a:lnTo>
-                    <a:pt x="4010861" y="1066641"/>
-                  </a:lnTo>
-                  <a:lnTo>
-                    <a:pt x="4082483" y="1079345"/>
-                  </a:lnTo>
-                  <a:lnTo>
-                    <a:pt x="4154106" y="1091881"/>
-                  </a:lnTo>
-                  <a:lnTo>
-                    <a:pt x="4225729" y="1104250"/>
-                  </a:lnTo>
-                  <a:lnTo>
-                    <a:pt x="4297351" y="1116455"/>
-                  </a:lnTo>
-                  <a:lnTo>
-                    <a:pt x="4368974" y="1128497"/>
-                  </a:lnTo>
-                  <a:lnTo>
-                    <a:pt x="4440596" y="1140379"/>
-                  </a:lnTo>
-                  <a:lnTo>
-                    <a:pt x="4512219" y="1152103"/>
-                  </a:lnTo>
-                  <a:lnTo>
-                    <a:pt x="4583841" y="1163672"/>
-                  </a:lnTo>
-                  <a:lnTo>
-                    <a:pt x="4655464" y="1175086"/>
-                  </a:lnTo>
-                  <a:lnTo>
-                    <a:pt x="4727086" y="1186348"/>
-                  </a:lnTo>
-                  <a:lnTo>
-                    <a:pt x="4798709" y="1193176"/>
-                  </a:lnTo>
-                  <a:lnTo>
-                    <a:pt x="4870331" y="1194952"/>
-                  </a:lnTo>
-                  <a:lnTo>
-                    <a:pt x="4941954" y="1196724"/>
-                  </a:lnTo>
-                  <a:lnTo>
-                    <a:pt x="5013576" y="1198492"/>
-                  </a:lnTo>
-                  <a:lnTo>
-                    <a:pt x="5085199" y="1200256"/>
-                  </a:lnTo>
-                  <a:lnTo>
-                    <a:pt x="5156821" y="1202016"/>
-                  </a:lnTo>
-                  <a:lnTo>
-                    <a:pt x="5228444" y="1203773"/>
-                  </a:lnTo>
-                  <a:lnTo>
-                    <a:pt x="5300066" y="1205526"/>
-                  </a:lnTo>
-                  <a:lnTo>
-                    <a:pt x="5371689" y="1207275"/>
-                  </a:lnTo>
-                  <a:lnTo>
-                    <a:pt x="5443311" y="1209020"/>
-                  </a:lnTo>
-                  <a:lnTo>
-                    <a:pt x="5514934" y="1210762"/>
-                  </a:lnTo>
-                  <a:lnTo>
-                    <a:pt x="5586557" y="1212500"/>
-                  </a:lnTo>
-                  <a:lnTo>
-                    <a:pt x="5658179" y="1214234"/>
-                  </a:lnTo>
-                  <a:lnTo>
-                    <a:pt x="5729802" y="1215964"/>
-                  </a:lnTo>
-                  <a:lnTo>
-                    <a:pt x="5801424" y="1217691"/>
-                  </a:lnTo>
-                  <a:lnTo>
-                    <a:pt x="5873047" y="1219414"/>
-                  </a:lnTo>
-                  <a:lnTo>
-                    <a:pt x="5944669" y="1221133"/>
-                  </a:lnTo>
-                  <a:lnTo>
-                    <a:pt x="6016292" y="1222849"/>
-                  </a:lnTo>
-                  <a:lnTo>
-                    <a:pt x="6087914" y="1224561"/>
-                  </a:lnTo>
-                  <a:lnTo>
-                    <a:pt x="6159537" y="1226269"/>
-                  </a:lnTo>
-                  <a:lnTo>
-                    <a:pt x="6231159" y="1227974"/>
-                  </a:lnTo>
-                  <a:lnTo>
-                    <a:pt x="6302782" y="1229675"/>
-                  </a:lnTo>
-                  <a:lnTo>
-                    <a:pt x="6374404" y="1231372"/>
-                  </a:lnTo>
-                  <a:lnTo>
-                    <a:pt x="6446027" y="1233066"/>
-                  </a:lnTo>
-                  <a:lnTo>
-                    <a:pt x="6517649" y="1234756"/>
-                  </a:lnTo>
-                  <a:lnTo>
-                    <a:pt x="6589272" y="1236443"/>
-                  </a:lnTo>
-                  <a:lnTo>
-                    <a:pt x="6660894" y="1238125"/>
-                  </a:lnTo>
-                  <a:lnTo>
-                    <a:pt x="6732517" y="1239805"/>
-                  </a:lnTo>
-                  <a:lnTo>
-                    <a:pt x="6804139" y="1241480"/>
-                  </a:lnTo>
-                  <a:lnTo>
-                    <a:pt x="6875762" y="1243152"/>
-                  </a:lnTo>
-                  <a:lnTo>
-                    <a:pt x="6947385" y="1244821"/>
-                  </a:lnTo>
-                  <a:lnTo>
-                    <a:pt x="7019007" y="1246486"/>
-                  </a:lnTo>
-                  <a:lnTo>
-                    <a:pt x="7090630" y="1248147"/>
-                  </a:lnTo>
-                  <a:lnTo>
-                    <a:pt x="7090630" y="1484756"/>
-                  </a:lnTo>
-                  <a:lnTo>
-                    <a:pt x="7019007" y="1477516"/>
-                  </a:lnTo>
-                  <a:lnTo>
-                    <a:pt x="6947385" y="1470178"/>
-                  </a:lnTo>
-                  <a:lnTo>
-                    <a:pt x="6875762" y="1462742"/>
-                  </a:lnTo>
-                  <a:lnTo>
-                    <a:pt x="6804139" y="1455206"/>
-                  </a:lnTo>
-                  <a:lnTo>
-                    <a:pt x="6732517" y="1447567"/>
-                  </a:lnTo>
-                  <a:lnTo>
-                    <a:pt x="6660894" y="1439826"/>
-                  </a:lnTo>
-                  <a:lnTo>
-                    <a:pt x="6589272" y="1431981"/>
-                  </a:lnTo>
-                  <a:lnTo>
-                    <a:pt x="6517649" y="1424030"/>
-                  </a:lnTo>
-                  <a:lnTo>
-                    <a:pt x="6446027" y="1415971"/>
-                  </a:lnTo>
-                  <a:lnTo>
-                    <a:pt x="6374404" y="1407804"/>
-                  </a:lnTo>
-                  <a:lnTo>
-                    <a:pt x="6302782" y="1399527"/>
-                  </a:lnTo>
-                  <a:lnTo>
-                    <a:pt x="6231159" y="1391138"/>
-                  </a:lnTo>
-                  <a:lnTo>
-                    <a:pt x="6159537" y="1382637"/>
-                  </a:lnTo>
-                  <a:lnTo>
-                    <a:pt x="6087914" y="1374020"/>
-                  </a:lnTo>
-                  <a:lnTo>
-                    <a:pt x="6016292" y="1365288"/>
-                  </a:lnTo>
-                  <a:lnTo>
-                    <a:pt x="5944669" y="1356437"/>
-                  </a:lnTo>
-                  <a:lnTo>
-                    <a:pt x="5873047" y="1347468"/>
-                  </a:lnTo>
-                  <a:lnTo>
-                    <a:pt x="5801424" y="1338377"/>
-                  </a:lnTo>
-                  <a:lnTo>
-                    <a:pt x="5729802" y="1329164"/>
-                  </a:lnTo>
-                  <a:lnTo>
-                    <a:pt x="5658179" y="1319827"/>
-                  </a:lnTo>
-                  <a:lnTo>
-                    <a:pt x="5586557" y="1310364"/>
-                  </a:lnTo>
-                  <a:lnTo>
-                    <a:pt x="5514934" y="1300773"/>
-                  </a:lnTo>
-                  <a:lnTo>
-                    <a:pt x="5443311" y="1291053"/>
-                  </a:lnTo>
-                  <a:lnTo>
-                    <a:pt x="5371689" y="1281203"/>
-                  </a:lnTo>
-                  <a:lnTo>
-                    <a:pt x="5300066" y="1271219"/>
-                  </a:lnTo>
-                  <a:lnTo>
-                    <a:pt x="5228444" y="1261100"/>
-                  </a:lnTo>
-                  <a:lnTo>
-                    <a:pt x="5156821" y="1250846"/>
-                  </a:lnTo>
-                  <a:lnTo>
-                    <a:pt x="5085199" y="1240453"/>
-                  </a:lnTo>
-                  <a:lnTo>
-                    <a:pt x="5013576" y="1229920"/>
-                  </a:lnTo>
-                  <a:lnTo>
-                    <a:pt x="4941954" y="1219245"/>
-                  </a:lnTo>
-                  <a:lnTo>
-                    <a:pt x="4870331" y="1208426"/>
-                  </a:lnTo>
-                  <a:lnTo>
-                    <a:pt x="4798709" y="1197461"/>
-                  </a:lnTo>
-                  <a:lnTo>
-                    <a:pt x="4727086" y="1191397"/>
-                  </a:lnTo>
-                  <a:lnTo>
-                    <a:pt x="4655464" y="1189614"/>
-                  </a:lnTo>
-                  <a:lnTo>
-                    <a:pt x="4583841" y="1187827"/>
-                  </a:lnTo>
-                  <a:lnTo>
-                    <a:pt x="4512219" y="1186036"/>
-                  </a:lnTo>
-                  <a:lnTo>
-                    <a:pt x="4440596" y="1184241"/>
-                  </a:lnTo>
-                  <a:lnTo>
-                    <a:pt x="4368974" y="1182443"/>
-                  </a:lnTo>
-                  <a:lnTo>
-                    <a:pt x="4297351" y="1180640"/>
-                  </a:lnTo>
-                  <a:lnTo>
-                    <a:pt x="4225729" y="1178834"/>
-                  </a:lnTo>
-                  <a:lnTo>
-                    <a:pt x="4154106" y="1177024"/>
-                  </a:lnTo>
-                  <a:lnTo>
-                    <a:pt x="4082483" y="1175210"/>
-                  </a:lnTo>
-                  <a:lnTo>
-                    <a:pt x="4010861" y="1173392"/>
-                  </a:lnTo>
-                  <a:lnTo>
-                    <a:pt x="3939238" y="1171570"/>
-                  </a:lnTo>
-                  <a:lnTo>
-                    <a:pt x="3867616" y="1169744"/>
-                  </a:lnTo>
-                  <a:lnTo>
-                    <a:pt x="3795993" y="1167915"/>
-                  </a:lnTo>
-                  <a:lnTo>
-                    <a:pt x="3724371" y="1166081"/>
-                  </a:lnTo>
-                  <a:lnTo>
-                    <a:pt x="3652748" y="1164243"/>
-                  </a:lnTo>
-                  <a:lnTo>
-                    <a:pt x="3581126" y="1162402"/>
-                  </a:lnTo>
-                  <a:lnTo>
-                    <a:pt x="3509503" y="1160556"/>
-                  </a:lnTo>
-                  <a:lnTo>
-                    <a:pt x="3437881" y="1158707"/>
-                  </a:lnTo>
-                  <a:lnTo>
-                    <a:pt x="3366258" y="1156854"/>
-                  </a:lnTo>
-                  <a:lnTo>
-                    <a:pt x="3294636" y="1154996"/>
-                  </a:lnTo>
-                  <a:lnTo>
-                    <a:pt x="3223013" y="1153135"/>
-                  </a:lnTo>
-                  <a:lnTo>
-                    <a:pt x="3151391" y="1151270"/>
-                  </a:lnTo>
-                  <a:lnTo>
-                    <a:pt x="3079768" y="1149400"/>
-                  </a:lnTo>
-                  <a:lnTo>
-                    <a:pt x="3008146" y="1147527"/>
-                  </a:lnTo>
-                  <a:lnTo>
-                    <a:pt x="2936523" y="1145649"/>
-                  </a:lnTo>
-                  <a:lnTo>
-                    <a:pt x="2864901" y="1143768"/>
-                  </a:lnTo>
-                  <a:lnTo>
-                    <a:pt x="2793278" y="1141883"/>
-                  </a:lnTo>
-                  <a:lnTo>
-                    <a:pt x="2721655" y="1139993"/>
-                  </a:lnTo>
-                  <a:lnTo>
-                    <a:pt x="2650033" y="1138099"/>
-                  </a:lnTo>
-                  <a:lnTo>
-                    <a:pt x="2578410" y="1136202"/>
-                  </a:lnTo>
-                  <a:lnTo>
-                    <a:pt x="2506788" y="1134300"/>
-                  </a:lnTo>
-                  <a:lnTo>
-                    <a:pt x="2435165" y="1132394"/>
-                  </a:lnTo>
-                  <a:lnTo>
-                    <a:pt x="2363543" y="1130484"/>
-                  </a:lnTo>
-                  <a:lnTo>
-                    <a:pt x="2291920" y="1128570"/>
-                  </a:lnTo>
-                  <a:lnTo>
-                    <a:pt x="2220298" y="1126652"/>
-                  </a:lnTo>
-                  <a:lnTo>
-                    <a:pt x="2148675" y="1124730"/>
-                  </a:lnTo>
-                  <a:lnTo>
-                    <a:pt x="2077053" y="1122804"/>
-                  </a:lnTo>
-                  <a:lnTo>
-                    <a:pt x="2005430" y="1120873"/>
-                  </a:lnTo>
-                  <a:lnTo>
-                    <a:pt x="1933808" y="1118939"/>
-                  </a:lnTo>
-                  <a:lnTo>
-                    <a:pt x="1862185" y="1117000"/>
-                  </a:lnTo>
-                  <a:lnTo>
-                    <a:pt x="1790563" y="1115057"/>
-                  </a:lnTo>
-                  <a:lnTo>
-                    <a:pt x="1718940" y="1113110"/>
-                  </a:lnTo>
-                  <a:lnTo>
-                    <a:pt x="1647318" y="1111159"/>
-                  </a:lnTo>
-                  <a:lnTo>
-                    <a:pt x="1575695" y="1109203"/>
-                  </a:lnTo>
-                  <a:lnTo>
-                    <a:pt x="1504073" y="1107243"/>
-                  </a:lnTo>
-                  <a:lnTo>
-                    <a:pt x="1432450" y="1105279"/>
-                  </a:lnTo>
-                  <a:lnTo>
-                    <a:pt x="1360827" y="1103311"/>
-                  </a:lnTo>
-                  <a:lnTo>
-                    <a:pt x="1289205" y="1101339"/>
-                  </a:lnTo>
-                  <a:lnTo>
-                    <a:pt x="1217582" y="1099362"/>
-                  </a:lnTo>
-                  <a:lnTo>
-                    <a:pt x="1145960" y="1097382"/>
-                  </a:lnTo>
-                  <a:lnTo>
-                    <a:pt x="1074337" y="1095397"/>
-                  </a:lnTo>
-                  <a:lnTo>
-                    <a:pt x="1002715" y="1093407"/>
-                  </a:lnTo>
-                  <a:lnTo>
-                    <a:pt x="931092" y="1091414"/>
-                  </a:lnTo>
-                  <a:lnTo>
-                    <a:pt x="859470" y="1089416"/>
-                  </a:lnTo>
-                  <a:lnTo>
-                    <a:pt x="787847" y="1087414"/>
-                  </a:lnTo>
-                  <a:lnTo>
-                    <a:pt x="716225" y="1085407"/>
-                  </a:lnTo>
-                  <a:lnTo>
-                    <a:pt x="644602" y="1083396"/>
-                  </a:lnTo>
-                  <a:lnTo>
-                    <a:pt x="572980" y="1081381"/>
-                  </a:lnTo>
-                  <a:lnTo>
-                    <a:pt x="501357" y="1079362"/>
-                  </a:lnTo>
-                  <a:lnTo>
-                    <a:pt x="429735" y="1077338"/>
-                  </a:lnTo>
-                  <a:lnTo>
-                    <a:pt x="358112" y="1075310"/>
-                  </a:lnTo>
-                  <a:lnTo>
-                    <a:pt x="286490" y="1073277"/>
-                  </a:lnTo>
-                  <a:lnTo>
-                    <a:pt x="214867" y="1071241"/>
-                  </a:lnTo>
-                  <a:lnTo>
-                    <a:pt x="143245" y="1069199"/>
-                  </a:lnTo>
-                  <a:lnTo>
-                    <a:pt x="71622" y="1067154"/>
-                  </a:lnTo>
-                  <a:lnTo>
-                    <a:pt x="0" y="1065104"/>
+                    <a:pt x="71622" y="27409"/>
+                  </a:lnTo>
+                  <a:lnTo>
+                    <a:pt x="143245" y="54450"/>
+                  </a:lnTo>
+                  <a:lnTo>
+                    <a:pt x="214867" y="81128"/>
+                  </a:lnTo>
+                  <a:lnTo>
+                    <a:pt x="286490" y="107447"/>
+                  </a:lnTo>
+                  <a:lnTo>
+                    <a:pt x="358112" y="133413"/>
+                  </a:lnTo>
+                  <a:lnTo>
+                    <a:pt x="429735" y="159030"/>
+                  </a:lnTo>
+                  <a:lnTo>
+                    <a:pt x="501357" y="184303"/>
+                  </a:lnTo>
+                  <a:lnTo>
+                    <a:pt x="572980" y="209236"/>
+                  </a:lnTo>
+                  <a:lnTo>
+                    <a:pt x="644602" y="233835"/>
+                  </a:lnTo>
+                  <a:lnTo>
+                    <a:pt x="716225" y="258102"/>
+                  </a:lnTo>
+                  <a:lnTo>
+                    <a:pt x="787847" y="282044"/>
+                  </a:lnTo>
+                  <a:lnTo>
+                    <a:pt x="859470" y="305664"/>
+                  </a:lnTo>
+                  <a:lnTo>
+                    <a:pt x="931092" y="328967"/>
+                  </a:lnTo>
+                  <a:lnTo>
+                    <a:pt x="1002715" y="351957"/>
+                  </a:lnTo>
+                  <a:lnTo>
+                    <a:pt x="1074337" y="374638"/>
+                  </a:lnTo>
+                  <a:lnTo>
+                    <a:pt x="1145960" y="397014"/>
+                  </a:lnTo>
+                  <a:lnTo>
+                    <a:pt x="1217582" y="419089"/>
+                  </a:lnTo>
+                  <a:lnTo>
+                    <a:pt x="1289205" y="440868"/>
+                  </a:lnTo>
+                  <a:lnTo>
+                    <a:pt x="1360827" y="462355"/>
+                  </a:lnTo>
+                  <a:lnTo>
+                    <a:pt x="1432450" y="483552"/>
+                  </a:lnTo>
+                  <a:lnTo>
+                    <a:pt x="1504073" y="504465"/>
+                  </a:lnTo>
+                  <a:lnTo>
+                    <a:pt x="1575695" y="525097"/>
+                  </a:lnTo>
+                  <a:lnTo>
+                    <a:pt x="1647318" y="545452"/>
+                  </a:lnTo>
+                  <a:lnTo>
+                    <a:pt x="1718940" y="565533"/>
+                  </a:lnTo>
+                  <a:lnTo>
+                    <a:pt x="1790563" y="585345"/>
+                  </a:lnTo>
+                  <a:lnTo>
+                    <a:pt x="1862185" y="604890"/>
+                  </a:lnTo>
+                  <a:lnTo>
+                    <a:pt x="1933808" y="624173"/>
+                  </a:lnTo>
+                  <a:lnTo>
+                    <a:pt x="2005430" y="643196"/>
+                  </a:lnTo>
+                  <a:lnTo>
+                    <a:pt x="2077053" y="661965"/>
+                  </a:lnTo>
+                  <a:lnTo>
+                    <a:pt x="2148675" y="680481"/>
+                  </a:lnTo>
+                  <a:lnTo>
+                    <a:pt x="2220298" y="698748"/>
+                  </a:lnTo>
+                  <a:lnTo>
+                    <a:pt x="2291920" y="716769"/>
+                  </a:lnTo>
+                  <a:lnTo>
+                    <a:pt x="2363543" y="734549"/>
+                  </a:lnTo>
+                  <a:lnTo>
+                    <a:pt x="2435165" y="752090"/>
+                  </a:lnTo>
+                  <a:lnTo>
+                    <a:pt x="2506788" y="769395"/>
+                  </a:lnTo>
+                  <a:lnTo>
+                    <a:pt x="2578410" y="786468"/>
+                  </a:lnTo>
+                  <a:lnTo>
+                    <a:pt x="2650033" y="803311"/>
+                  </a:lnTo>
+                  <a:lnTo>
+                    <a:pt x="2721655" y="819928"/>
+                  </a:lnTo>
+                  <a:lnTo>
+                    <a:pt x="2793278" y="836322"/>
+                  </a:lnTo>
+                  <a:lnTo>
+                    <a:pt x="2864901" y="852495"/>
+                  </a:lnTo>
+                  <a:lnTo>
+                    <a:pt x="2936523" y="868451"/>
+                  </a:lnTo>
+                  <a:lnTo>
+                    <a:pt x="3008146" y="884193"/>
+                  </a:lnTo>
+                  <a:lnTo>
+                    <a:pt x="3079768" y="899723"/>
+                  </a:lnTo>
+                  <a:lnTo>
+                    <a:pt x="3151391" y="915045"/>
+                  </a:lnTo>
+                  <a:lnTo>
+                    <a:pt x="3223013" y="930161"/>
+                  </a:lnTo>
+                  <a:lnTo>
+                    <a:pt x="3294636" y="945074"/>
+                  </a:lnTo>
+                  <a:lnTo>
+                    <a:pt x="3366258" y="959786"/>
+                  </a:lnTo>
+                  <a:lnTo>
+                    <a:pt x="3437881" y="974301"/>
+                  </a:lnTo>
+                  <a:lnTo>
+                    <a:pt x="3509503" y="988621"/>
+                  </a:lnTo>
+                  <a:lnTo>
+                    <a:pt x="3581126" y="1002748"/>
+                  </a:lnTo>
+                  <a:lnTo>
+                    <a:pt x="3652748" y="1016685"/>
+                  </a:lnTo>
+                  <a:lnTo>
+                    <a:pt x="3724371" y="1030436"/>
+                  </a:lnTo>
+                  <a:lnTo>
+                    <a:pt x="3795993" y="1044001"/>
+                  </a:lnTo>
+                  <a:lnTo>
+                    <a:pt x="3867616" y="1057385"/>
+                  </a:lnTo>
+                  <a:lnTo>
+                    <a:pt x="3939238" y="1070588"/>
+                  </a:lnTo>
+                  <a:lnTo>
+                    <a:pt x="4010861" y="1083614"/>
+                  </a:lnTo>
+                  <a:lnTo>
+                    <a:pt x="4082483" y="1096465"/>
+                  </a:lnTo>
+                  <a:lnTo>
+                    <a:pt x="4154106" y="1109144"/>
+                  </a:lnTo>
+                  <a:lnTo>
+                    <a:pt x="4225729" y="1121652"/>
+                  </a:lnTo>
+                  <a:lnTo>
+                    <a:pt x="4297351" y="1133992"/>
+                  </a:lnTo>
+                  <a:lnTo>
+                    <a:pt x="4368974" y="1146166"/>
+                  </a:lnTo>
+                  <a:lnTo>
+                    <a:pt x="4440596" y="1158177"/>
+                  </a:lnTo>
+                  <a:lnTo>
+                    <a:pt x="4512219" y="1170026"/>
+                  </a:lnTo>
+                  <a:lnTo>
+                    <a:pt x="4583841" y="1181717"/>
+                  </a:lnTo>
+                  <a:lnTo>
+                    <a:pt x="4655464" y="1193250"/>
+                  </a:lnTo>
+                  <a:lnTo>
+                    <a:pt x="4727086" y="1204628"/>
+                  </a:lnTo>
+                  <a:lnTo>
+                    <a:pt x="4798709" y="1211582"/>
+                  </a:lnTo>
+                  <a:lnTo>
+                    <a:pt x="4870331" y="1213497"/>
+                  </a:lnTo>
+                  <a:lnTo>
+                    <a:pt x="4941954" y="1215408"/>
+                  </a:lnTo>
+                  <a:lnTo>
+                    <a:pt x="5013576" y="1217315"/>
+                  </a:lnTo>
+                  <a:lnTo>
+                    <a:pt x="5085199" y="1219217"/>
+                  </a:lnTo>
+                  <a:lnTo>
+                    <a:pt x="5156821" y="1221115"/>
+                  </a:lnTo>
+                  <a:lnTo>
+                    <a:pt x="5228444" y="1223008"/>
+                  </a:lnTo>
+                  <a:lnTo>
+                    <a:pt x="5300066" y="1224897"/>
+                  </a:lnTo>
+                  <a:lnTo>
+                    <a:pt x="5371689" y="1226781"/>
+                  </a:lnTo>
+                  <a:lnTo>
+                    <a:pt x="5443311" y="1228662"/>
+                  </a:lnTo>
+                  <a:lnTo>
+                    <a:pt x="5514934" y="1230537"/>
+                  </a:lnTo>
+                  <a:lnTo>
+                    <a:pt x="5586557" y="1232409"/>
+                  </a:lnTo>
+                  <a:lnTo>
+                    <a:pt x="5658179" y="1234276"/>
+                  </a:lnTo>
+                  <a:lnTo>
+                    <a:pt x="5729802" y="1236139"/>
+                  </a:lnTo>
+                  <a:lnTo>
+                    <a:pt x="5801424" y="1237998"/>
+                  </a:lnTo>
+                  <a:lnTo>
+                    <a:pt x="5873047" y="1239852"/>
+                  </a:lnTo>
+                  <a:lnTo>
+                    <a:pt x="5944669" y="1241702"/>
+                  </a:lnTo>
+                  <a:lnTo>
+                    <a:pt x="6016292" y="1243548"/>
+                  </a:lnTo>
+                  <a:lnTo>
+                    <a:pt x="6087914" y="1245389"/>
+                  </a:lnTo>
+                  <a:lnTo>
+                    <a:pt x="6159537" y="1247226"/>
+                  </a:lnTo>
+                  <a:lnTo>
+                    <a:pt x="6231159" y="1249059"/>
+                  </a:lnTo>
+                  <a:lnTo>
+                    <a:pt x="6302782" y="1250888"/>
+                  </a:lnTo>
+                  <a:lnTo>
+                    <a:pt x="6374404" y="1252712"/>
+                  </a:lnTo>
+                  <a:lnTo>
+                    <a:pt x="6446027" y="1254533"/>
+                  </a:lnTo>
+                  <a:lnTo>
+                    <a:pt x="6517649" y="1256349"/>
+                  </a:lnTo>
+                  <a:lnTo>
+                    <a:pt x="6589272" y="1258161"/>
+                  </a:lnTo>
+                  <a:lnTo>
+                    <a:pt x="6660894" y="1259968"/>
+                  </a:lnTo>
+                  <a:lnTo>
+                    <a:pt x="6732517" y="1261772"/>
+                  </a:lnTo>
+                  <a:lnTo>
+                    <a:pt x="6804139" y="1263571"/>
+                  </a:lnTo>
+                  <a:lnTo>
+                    <a:pt x="6875762" y="1265366"/>
+                  </a:lnTo>
+                  <a:lnTo>
+                    <a:pt x="6947385" y="1267157"/>
+                  </a:lnTo>
+                  <a:lnTo>
+                    <a:pt x="7019007" y="1268944"/>
+                  </a:lnTo>
+                  <a:lnTo>
+                    <a:pt x="7090630" y="1270727"/>
+                  </a:lnTo>
+                  <a:lnTo>
+                    <a:pt x="7090630" y="1505457"/>
+                  </a:lnTo>
+                  <a:lnTo>
+                    <a:pt x="7019007" y="1498176"/>
+                  </a:lnTo>
+                  <a:lnTo>
+                    <a:pt x="6947385" y="1490795"/>
+                  </a:lnTo>
+                  <a:lnTo>
+                    <a:pt x="6875762" y="1483314"/>
+                  </a:lnTo>
+                  <a:lnTo>
+                    <a:pt x="6804139" y="1475731"/>
+                  </a:lnTo>
+                  <a:lnTo>
+                    <a:pt x="6732517" y="1468045"/>
+                  </a:lnTo>
+                  <a:lnTo>
+                    <a:pt x="6660894" y="1460254"/>
+                  </a:lnTo>
+                  <a:lnTo>
+                    <a:pt x="6589272" y="1452356"/>
+                  </a:lnTo>
+                  <a:lnTo>
+                    <a:pt x="6517649" y="1444352"/>
+                  </a:lnTo>
+                  <a:lnTo>
+                    <a:pt x="6446027" y="1436238"/>
+                  </a:lnTo>
+                  <a:lnTo>
+                    <a:pt x="6374404" y="1428014"/>
+                  </a:lnTo>
+                  <a:lnTo>
+                    <a:pt x="6302782" y="1419678"/>
+                  </a:lnTo>
+                  <a:lnTo>
+                    <a:pt x="6231159" y="1411228"/>
+                  </a:lnTo>
+                  <a:lnTo>
+                    <a:pt x="6159537" y="1402663"/>
+                  </a:lnTo>
+                  <a:lnTo>
+                    <a:pt x="6087914" y="1393982"/>
+                  </a:lnTo>
+                  <a:lnTo>
+                    <a:pt x="6016292" y="1385183"/>
+                  </a:lnTo>
+                  <a:lnTo>
+                    <a:pt x="5944669" y="1376263"/>
+                  </a:lnTo>
+                  <a:lnTo>
+                    <a:pt x="5873047" y="1367222"/>
+                  </a:lnTo>
+                  <a:lnTo>
+                    <a:pt x="5801424" y="1358058"/>
+                  </a:lnTo>
+                  <a:lnTo>
+                    <a:pt x="5729802" y="1348770"/>
+                  </a:lnTo>
+                  <a:lnTo>
+                    <a:pt x="5658179" y="1339354"/>
+                  </a:lnTo>
+                  <a:lnTo>
+                    <a:pt x="5586557" y="1329811"/>
+                  </a:lnTo>
+                  <a:lnTo>
+                    <a:pt x="5514934" y="1320137"/>
+                  </a:lnTo>
+                  <a:lnTo>
+                    <a:pt x="5443311" y="1310332"/>
+                  </a:lnTo>
+                  <a:lnTo>
+                    <a:pt x="5371689" y="1300393"/>
+                  </a:lnTo>
+                  <a:lnTo>
+                    <a:pt x="5300066" y="1290319"/>
+                  </a:lnTo>
+                  <a:lnTo>
+                    <a:pt x="5228444" y="1280108"/>
+                  </a:lnTo>
+                  <a:lnTo>
+                    <a:pt x="5156821" y="1269758"/>
+                  </a:lnTo>
+                  <a:lnTo>
+                    <a:pt x="5085199" y="1259267"/>
+                  </a:lnTo>
+                  <a:lnTo>
+                    <a:pt x="5013576" y="1248632"/>
+                  </a:lnTo>
+                  <a:lnTo>
+                    <a:pt x="4941954" y="1237853"/>
+                  </a:lnTo>
+                  <a:lnTo>
+                    <a:pt x="4870331" y="1226928"/>
+                  </a:lnTo>
+                  <a:lnTo>
+                    <a:pt x="4798709" y="1215853"/>
+                  </a:lnTo>
+                  <a:lnTo>
+                    <a:pt x="4727086" y="1209662"/>
+                  </a:lnTo>
+                  <a:lnTo>
+                    <a:pt x="4655464" y="1207738"/>
+                  </a:lnTo>
+                  <a:lnTo>
+                    <a:pt x="4583841" y="1205809"/>
+                  </a:lnTo>
+                  <a:lnTo>
+                    <a:pt x="4512219" y="1203876"/>
+                  </a:lnTo>
+                  <a:lnTo>
+                    <a:pt x="4440596" y="1201939"/>
+                  </a:lnTo>
+                  <a:lnTo>
+                    <a:pt x="4368974" y="1199996"/>
+                  </a:lnTo>
+                  <a:lnTo>
+                    <a:pt x="4297351" y="1198050"/>
+                  </a:lnTo>
+                  <a:lnTo>
+                    <a:pt x="4225729" y="1196099"/>
+                  </a:lnTo>
+                  <a:lnTo>
+                    <a:pt x="4154106" y="1194143"/>
+                  </a:lnTo>
+                  <a:lnTo>
+                    <a:pt x="4082483" y="1192183"/>
+                  </a:lnTo>
+                  <a:lnTo>
+                    <a:pt x="4010861" y="1190218"/>
+                  </a:lnTo>
+                  <a:lnTo>
+                    <a:pt x="3939238" y="1188249"/>
+                  </a:lnTo>
+                  <a:lnTo>
+                    <a:pt x="3867616" y="1186275"/>
+                  </a:lnTo>
+                  <a:lnTo>
+                    <a:pt x="3795993" y="1184297"/>
+                  </a:lnTo>
+                  <a:lnTo>
+                    <a:pt x="3724371" y="1182314"/>
+                  </a:lnTo>
+                  <a:lnTo>
+                    <a:pt x="3652748" y="1180326"/>
+                  </a:lnTo>
+                  <a:lnTo>
+                    <a:pt x="3581126" y="1178334"/>
+                  </a:lnTo>
+                  <a:lnTo>
+                    <a:pt x="3509503" y="1176337"/>
+                  </a:lnTo>
+                  <a:lnTo>
+                    <a:pt x="3437881" y="1174336"/>
+                  </a:lnTo>
+                  <a:lnTo>
+                    <a:pt x="3366258" y="1172329"/>
+                  </a:lnTo>
+                  <a:lnTo>
+                    <a:pt x="3294636" y="1170319"/>
+                  </a:lnTo>
+                  <a:lnTo>
+                    <a:pt x="3223013" y="1168303"/>
+                  </a:lnTo>
+                  <a:lnTo>
+                    <a:pt x="3151391" y="1166283"/>
+                  </a:lnTo>
+                  <a:lnTo>
+                    <a:pt x="3079768" y="1164259"/>
+                  </a:lnTo>
+                  <a:lnTo>
+                    <a:pt x="3008146" y="1162229"/>
+                  </a:lnTo>
+                  <a:lnTo>
+                    <a:pt x="2936523" y="1160195"/>
+                  </a:lnTo>
+                  <a:lnTo>
+                    <a:pt x="2864901" y="1158156"/>
+                  </a:lnTo>
+                  <a:lnTo>
+                    <a:pt x="2793278" y="1156113"/>
+                  </a:lnTo>
+                  <a:lnTo>
+                    <a:pt x="2721655" y="1154064"/>
+                  </a:lnTo>
+                  <a:lnTo>
+                    <a:pt x="2650033" y="1152011"/>
+                  </a:lnTo>
+                  <a:lnTo>
+                    <a:pt x="2578410" y="1149954"/>
+                  </a:lnTo>
+                  <a:lnTo>
+                    <a:pt x="2506788" y="1147891"/>
+                  </a:lnTo>
+                  <a:lnTo>
+                    <a:pt x="2435165" y="1145824"/>
+                  </a:lnTo>
+                  <a:lnTo>
+                    <a:pt x="2363543" y="1143751"/>
+                  </a:lnTo>
+                  <a:lnTo>
+                    <a:pt x="2291920" y="1141675"/>
+                  </a:lnTo>
+                  <a:lnTo>
+                    <a:pt x="2220298" y="1139593"/>
+                  </a:lnTo>
+                  <a:lnTo>
+                    <a:pt x="2148675" y="1137506"/>
+                  </a:lnTo>
+                  <a:lnTo>
+                    <a:pt x="2077053" y="1135415"/>
+                  </a:lnTo>
+                  <a:lnTo>
+                    <a:pt x="2005430" y="1133319"/>
+                  </a:lnTo>
+                  <a:lnTo>
+                    <a:pt x="1933808" y="1131217"/>
+                  </a:lnTo>
+                  <a:lnTo>
+                    <a:pt x="1862185" y="1129111"/>
+                  </a:lnTo>
+                  <a:lnTo>
+                    <a:pt x="1790563" y="1127001"/>
+                  </a:lnTo>
+                  <a:lnTo>
+                    <a:pt x="1718940" y="1124885"/>
+                  </a:lnTo>
+                  <a:lnTo>
+                    <a:pt x="1647318" y="1122764"/>
+                  </a:lnTo>
+                  <a:lnTo>
+                    <a:pt x="1575695" y="1120639"/>
+                  </a:lnTo>
+                  <a:lnTo>
+                    <a:pt x="1504073" y="1118508"/>
+                  </a:lnTo>
+                  <a:lnTo>
+                    <a:pt x="1432450" y="1116373"/>
+                  </a:lnTo>
+                  <a:lnTo>
+                    <a:pt x="1360827" y="1114232"/>
+                  </a:lnTo>
+                  <a:lnTo>
+                    <a:pt x="1289205" y="1112087"/>
+                  </a:lnTo>
+                  <a:lnTo>
+                    <a:pt x="1217582" y="1109937"/>
+                  </a:lnTo>
+                  <a:lnTo>
+                    <a:pt x="1145960" y="1107781"/>
+                  </a:lnTo>
+                  <a:lnTo>
+                    <a:pt x="1074337" y="1105621"/>
+                  </a:lnTo>
+                  <a:lnTo>
+                    <a:pt x="1002715" y="1103456"/>
+                  </a:lnTo>
+                  <a:lnTo>
+                    <a:pt x="931092" y="1101286"/>
+                  </a:lnTo>
+                  <a:lnTo>
+                    <a:pt x="859470" y="1099110"/>
+                  </a:lnTo>
+                  <a:lnTo>
+                    <a:pt x="787847" y="1096930"/>
+                  </a:lnTo>
+                  <a:lnTo>
+                    <a:pt x="716225" y="1094744"/>
+                  </a:lnTo>
+                  <a:lnTo>
+                    <a:pt x="644602" y="1092554"/>
+                  </a:lnTo>
+                  <a:lnTo>
+                    <a:pt x="572980" y="1090358"/>
+                  </a:lnTo>
+                  <a:lnTo>
+                    <a:pt x="501357" y="1088158"/>
+                  </a:lnTo>
+                  <a:lnTo>
+                    <a:pt x="429735" y="1085952"/>
+                  </a:lnTo>
+                  <a:lnTo>
+                    <a:pt x="358112" y="1083741"/>
+                  </a:lnTo>
+                  <a:lnTo>
+                    <a:pt x="286490" y="1081525"/>
+                  </a:lnTo>
+                  <a:lnTo>
+                    <a:pt x="214867" y="1079304"/>
+                  </a:lnTo>
+                  <a:lnTo>
+                    <a:pt x="143245" y="1077078"/>
+                  </a:lnTo>
+                  <a:lnTo>
+                    <a:pt x="71622" y="1074846"/>
+                  </a:lnTo>
+                  <a:lnTo>
+                    <a:pt x="0" y="1072610"/>
                   </a:lnTo>
                   <a:close/>
                 </a:path>
@@ -3676,312 +3676,312 @@
           </p:nvSpPr>
           <p:spPr>
             <a:xfrm>
-              <a:off x="1172049" y="3535429"/>
-              <a:ext cx="7090630" cy="1248147"/>
+              <a:off x="1172049" y="3517088"/>
+              <a:ext cx="7090630" cy="1270727"/>
             </a:xfrm>
             <a:custGeom>
               <a:avLst/>
               <a:pathLst>
-                <a:path w="7090630" h="1248147">
+                <a:path w="7090630" h="1270727">
                   <a:moveTo>
                     <a:pt x="0" y="0"/>
                   </a:moveTo>
                   <a:lnTo>
-                    <a:pt x="71622" y="26892"/>
-                  </a:lnTo>
-                  <a:lnTo>
-                    <a:pt x="143245" y="53426"/>
-                  </a:lnTo>
-                  <a:lnTo>
-                    <a:pt x="214867" y="79608"/>
-                  </a:lnTo>
-                  <a:lnTo>
-                    <a:pt x="286490" y="105441"/>
-                  </a:lnTo>
-                  <a:lnTo>
-                    <a:pt x="358112" y="130931"/>
-                  </a:lnTo>
-                  <a:lnTo>
-                    <a:pt x="429735" y="156082"/>
-                  </a:lnTo>
-                  <a:lnTo>
-                    <a:pt x="501357" y="180898"/>
-                  </a:lnTo>
-                  <a:lnTo>
-                    <a:pt x="572980" y="205384"/>
-                  </a:lnTo>
-                  <a:lnTo>
-                    <a:pt x="644602" y="229545"/>
-                  </a:lnTo>
-                  <a:lnTo>
-                    <a:pt x="716225" y="253384"/>
-                  </a:lnTo>
-                  <a:lnTo>
-                    <a:pt x="787847" y="276906"/>
-                  </a:lnTo>
-                  <a:lnTo>
-                    <a:pt x="859470" y="300115"/>
-                  </a:lnTo>
-                  <a:lnTo>
-                    <a:pt x="931092" y="323015"/>
-                  </a:lnTo>
-                  <a:lnTo>
-                    <a:pt x="1002715" y="345611"/>
-                  </a:lnTo>
-                  <a:lnTo>
-                    <a:pt x="1074337" y="367906"/>
-                  </a:lnTo>
-                  <a:lnTo>
-                    <a:pt x="1145960" y="389905"/>
-                  </a:lnTo>
-                  <a:lnTo>
-                    <a:pt x="1217582" y="411611"/>
-                  </a:lnTo>
-                  <a:lnTo>
-                    <a:pt x="1289205" y="433028"/>
-                  </a:lnTo>
-                  <a:lnTo>
-                    <a:pt x="1360827" y="454161"/>
-                  </a:lnTo>
-                  <a:lnTo>
-                    <a:pt x="1432450" y="475012"/>
-                  </a:lnTo>
-                  <a:lnTo>
-                    <a:pt x="1504073" y="495586"/>
-                  </a:lnTo>
-                  <a:lnTo>
-                    <a:pt x="1575695" y="515887"/>
-                  </a:lnTo>
-                  <a:lnTo>
-                    <a:pt x="1647318" y="535917"/>
-                  </a:lnTo>
-                  <a:lnTo>
-                    <a:pt x="1718940" y="555681"/>
-                  </a:lnTo>
-                  <a:lnTo>
-                    <a:pt x="1790563" y="575182"/>
-                  </a:lnTo>
-                  <a:lnTo>
-                    <a:pt x="1862185" y="594424"/>
-                  </a:lnTo>
-                  <a:lnTo>
-                    <a:pt x="1933808" y="613410"/>
-                  </a:lnTo>
-                  <a:lnTo>
-                    <a:pt x="2005430" y="632143"/>
-                  </a:lnTo>
-                  <a:lnTo>
-                    <a:pt x="2077053" y="650627"/>
-                  </a:lnTo>
-                  <a:lnTo>
-                    <a:pt x="2148675" y="668866"/>
-                  </a:lnTo>
-                  <a:lnTo>
-                    <a:pt x="2220298" y="686861"/>
-                  </a:lnTo>
-                  <a:lnTo>
-                    <a:pt x="2291920" y="704618"/>
-                  </a:lnTo>
-                  <a:lnTo>
-                    <a:pt x="2363543" y="722138"/>
-                  </a:lnTo>
-                  <a:lnTo>
-                    <a:pt x="2435165" y="739425"/>
-                  </a:lnTo>
-                  <a:lnTo>
-                    <a:pt x="2506788" y="756482"/>
-                  </a:lnTo>
-                  <a:lnTo>
-                    <a:pt x="2578410" y="773312"/>
-                  </a:lnTo>
-                  <a:lnTo>
-                    <a:pt x="2650033" y="789919"/>
-                  </a:lnTo>
-                  <a:lnTo>
-                    <a:pt x="2721655" y="806304"/>
-                  </a:lnTo>
-                  <a:lnTo>
-                    <a:pt x="2793278" y="822472"/>
-                  </a:lnTo>
-                  <a:lnTo>
-                    <a:pt x="2864901" y="838424"/>
-                  </a:lnTo>
-                  <a:lnTo>
-                    <a:pt x="2936523" y="854165"/>
-                  </a:lnTo>
-                  <a:lnTo>
-                    <a:pt x="3008146" y="869696"/>
-                  </a:lnTo>
-                  <a:lnTo>
-                    <a:pt x="3079768" y="885020"/>
-                  </a:lnTo>
-                  <a:lnTo>
-                    <a:pt x="3151391" y="900141"/>
-                  </a:lnTo>
-                  <a:lnTo>
-                    <a:pt x="3223013" y="915060"/>
-                  </a:lnTo>
-                  <a:lnTo>
-                    <a:pt x="3294636" y="929781"/>
-                  </a:lnTo>
-                  <a:lnTo>
-                    <a:pt x="3366258" y="944306"/>
-                  </a:lnTo>
-                  <a:lnTo>
-                    <a:pt x="3437881" y="958638"/>
-                  </a:lnTo>
-                  <a:lnTo>
-                    <a:pt x="3509503" y="972780"/>
-                  </a:lnTo>
-                  <a:lnTo>
-                    <a:pt x="3581126" y="986733"/>
-                  </a:lnTo>
-                  <a:lnTo>
-                    <a:pt x="3652748" y="1000501"/>
-                  </a:lnTo>
-                  <a:lnTo>
-                    <a:pt x="3724371" y="1014085"/>
-                  </a:lnTo>
-                  <a:lnTo>
-                    <a:pt x="3795993" y="1027489"/>
-                  </a:lnTo>
-                  <a:lnTo>
-                    <a:pt x="3867616" y="1040715"/>
-                  </a:lnTo>
-                  <a:lnTo>
-                    <a:pt x="3939238" y="1053764"/>
-                  </a:lnTo>
-                  <a:lnTo>
-                    <a:pt x="4010861" y="1066641"/>
-                  </a:lnTo>
-                  <a:lnTo>
-                    <a:pt x="4082483" y="1079345"/>
-                  </a:lnTo>
-                  <a:lnTo>
-                    <a:pt x="4154106" y="1091881"/>
-                  </a:lnTo>
-                  <a:lnTo>
-                    <a:pt x="4225729" y="1104250"/>
-                  </a:lnTo>
-                  <a:lnTo>
-                    <a:pt x="4297351" y="1116455"/>
-                  </a:lnTo>
-                  <a:lnTo>
-                    <a:pt x="4368974" y="1128497"/>
-                  </a:lnTo>
-                  <a:lnTo>
-                    <a:pt x="4440596" y="1140379"/>
-                  </a:lnTo>
-                  <a:lnTo>
-                    <a:pt x="4512219" y="1152103"/>
-                  </a:lnTo>
-                  <a:lnTo>
-                    <a:pt x="4583841" y="1163672"/>
-                  </a:lnTo>
-                  <a:lnTo>
-                    <a:pt x="4655464" y="1175086"/>
-                  </a:lnTo>
-                  <a:lnTo>
-                    <a:pt x="4727086" y="1186348"/>
-                  </a:lnTo>
-                  <a:lnTo>
-                    <a:pt x="4798709" y="1193176"/>
-                  </a:lnTo>
-                  <a:lnTo>
-                    <a:pt x="4870331" y="1194952"/>
-                  </a:lnTo>
-                  <a:lnTo>
-                    <a:pt x="4941954" y="1196724"/>
-                  </a:lnTo>
-                  <a:lnTo>
-                    <a:pt x="5013576" y="1198492"/>
-                  </a:lnTo>
-                  <a:lnTo>
-                    <a:pt x="5085199" y="1200256"/>
-                  </a:lnTo>
-                  <a:lnTo>
-                    <a:pt x="5156821" y="1202016"/>
-                  </a:lnTo>
-                  <a:lnTo>
-                    <a:pt x="5228444" y="1203773"/>
-                  </a:lnTo>
-                  <a:lnTo>
-                    <a:pt x="5300066" y="1205526"/>
-                  </a:lnTo>
-                  <a:lnTo>
-                    <a:pt x="5371689" y="1207275"/>
-                  </a:lnTo>
-                  <a:lnTo>
-                    <a:pt x="5443311" y="1209020"/>
-                  </a:lnTo>
-                  <a:lnTo>
-                    <a:pt x="5514934" y="1210762"/>
-                  </a:lnTo>
-                  <a:lnTo>
-                    <a:pt x="5586557" y="1212500"/>
-                  </a:lnTo>
-                  <a:lnTo>
-                    <a:pt x="5658179" y="1214234"/>
-                  </a:lnTo>
-                  <a:lnTo>
-                    <a:pt x="5729802" y="1215964"/>
-                  </a:lnTo>
-                  <a:lnTo>
-                    <a:pt x="5801424" y="1217691"/>
-                  </a:lnTo>
-                  <a:lnTo>
-                    <a:pt x="5873047" y="1219414"/>
-                  </a:lnTo>
-                  <a:lnTo>
-                    <a:pt x="5944669" y="1221133"/>
-                  </a:lnTo>
-                  <a:lnTo>
-                    <a:pt x="6016292" y="1222849"/>
-                  </a:lnTo>
-                  <a:lnTo>
-                    <a:pt x="6087914" y="1224561"/>
-                  </a:lnTo>
-                  <a:lnTo>
-                    <a:pt x="6159537" y="1226269"/>
-                  </a:lnTo>
-                  <a:lnTo>
-                    <a:pt x="6231159" y="1227974"/>
-                  </a:lnTo>
-                  <a:lnTo>
-                    <a:pt x="6302782" y="1229675"/>
-                  </a:lnTo>
-                  <a:lnTo>
-                    <a:pt x="6374404" y="1231372"/>
-                  </a:lnTo>
-                  <a:lnTo>
-                    <a:pt x="6446027" y="1233066"/>
-                  </a:lnTo>
-                  <a:lnTo>
-                    <a:pt x="6517649" y="1234756"/>
-                  </a:lnTo>
-                  <a:lnTo>
-                    <a:pt x="6589272" y="1236443"/>
-                  </a:lnTo>
-                  <a:lnTo>
-                    <a:pt x="6660894" y="1238125"/>
-                  </a:lnTo>
-                  <a:lnTo>
-                    <a:pt x="6732517" y="1239805"/>
-                  </a:lnTo>
-                  <a:lnTo>
-                    <a:pt x="6804139" y="1241480"/>
-                  </a:lnTo>
-                  <a:lnTo>
-                    <a:pt x="6875762" y="1243152"/>
-                  </a:lnTo>
-                  <a:lnTo>
-                    <a:pt x="6947385" y="1244821"/>
-                  </a:lnTo>
-                  <a:lnTo>
-                    <a:pt x="7019007" y="1246486"/>
-                  </a:lnTo>
-                  <a:lnTo>
-                    <a:pt x="7090630" y="1248147"/>
+                    <a:pt x="71622" y="27409"/>
+                  </a:lnTo>
+                  <a:lnTo>
+                    <a:pt x="143245" y="54450"/>
+                  </a:lnTo>
+                  <a:lnTo>
+                    <a:pt x="214867" y="81128"/>
+                  </a:lnTo>
+                  <a:lnTo>
+                    <a:pt x="286490" y="107447"/>
+                  </a:lnTo>
+                  <a:lnTo>
+                    <a:pt x="358112" y="133413"/>
+                  </a:lnTo>
+                  <a:lnTo>
+                    <a:pt x="429735" y="159030"/>
+                  </a:lnTo>
+                  <a:lnTo>
+                    <a:pt x="501357" y="184303"/>
+                  </a:lnTo>
+                  <a:lnTo>
+                    <a:pt x="572980" y="209236"/>
+                  </a:lnTo>
+                  <a:lnTo>
+                    <a:pt x="644602" y="233835"/>
+                  </a:lnTo>
+                  <a:lnTo>
+                    <a:pt x="716225" y="258102"/>
+                  </a:lnTo>
+                  <a:lnTo>
+                    <a:pt x="787847" y="282044"/>
+                  </a:lnTo>
+                  <a:lnTo>
+                    <a:pt x="859470" y="305664"/>
+                  </a:lnTo>
+                  <a:lnTo>
+                    <a:pt x="931092" y="328967"/>
+                  </a:lnTo>
+                  <a:lnTo>
+                    <a:pt x="1002715" y="351957"/>
+                  </a:lnTo>
+                  <a:lnTo>
+                    <a:pt x="1074337" y="374638"/>
+                  </a:lnTo>
+                  <a:lnTo>
+                    <a:pt x="1145960" y="397014"/>
+                  </a:lnTo>
+                  <a:lnTo>
+                    <a:pt x="1217582" y="419089"/>
+                  </a:lnTo>
+                  <a:lnTo>
+                    <a:pt x="1289205" y="440868"/>
+                  </a:lnTo>
+                  <a:lnTo>
+                    <a:pt x="1360827" y="462355"/>
+                  </a:lnTo>
+                  <a:lnTo>
+                    <a:pt x="1432450" y="483552"/>
+                  </a:lnTo>
+                  <a:lnTo>
+                    <a:pt x="1504073" y="504465"/>
+                  </a:lnTo>
+                  <a:lnTo>
+                    <a:pt x="1575695" y="525097"/>
+                  </a:lnTo>
+                  <a:lnTo>
+                    <a:pt x="1647318" y="545452"/>
+                  </a:lnTo>
+                  <a:lnTo>
+                    <a:pt x="1718940" y="565533"/>
+                  </a:lnTo>
+                  <a:lnTo>
+                    <a:pt x="1790563" y="585345"/>
+                  </a:lnTo>
+                  <a:lnTo>
+                    <a:pt x="1862185" y="604890"/>
+                  </a:lnTo>
+                  <a:lnTo>
+                    <a:pt x="1933808" y="624173"/>
+                  </a:lnTo>
+                  <a:lnTo>
+                    <a:pt x="2005430" y="643196"/>
+                  </a:lnTo>
+                  <a:lnTo>
+                    <a:pt x="2077053" y="661965"/>
+                  </a:lnTo>
+                  <a:lnTo>
+                    <a:pt x="2148675" y="680481"/>
+                  </a:lnTo>
+                  <a:lnTo>
+                    <a:pt x="2220298" y="698748"/>
+                  </a:lnTo>
+                  <a:lnTo>
+                    <a:pt x="2291920" y="716769"/>
+                  </a:lnTo>
+                  <a:lnTo>
+                    <a:pt x="2363543" y="734549"/>
+                  </a:lnTo>
+                  <a:lnTo>
+                    <a:pt x="2435165" y="752090"/>
+                  </a:lnTo>
+                  <a:lnTo>
+                    <a:pt x="2506788" y="769395"/>
+                  </a:lnTo>
+                  <a:lnTo>
+                    <a:pt x="2578410" y="786468"/>
+                  </a:lnTo>
+                  <a:lnTo>
+                    <a:pt x="2650033" y="803311"/>
+                  </a:lnTo>
+                  <a:lnTo>
+                    <a:pt x="2721655" y="819928"/>
+                  </a:lnTo>
+                  <a:lnTo>
+                    <a:pt x="2793278" y="836322"/>
+                  </a:lnTo>
+                  <a:lnTo>
+                    <a:pt x="2864901" y="852495"/>
+                  </a:lnTo>
+                  <a:lnTo>
+                    <a:pt x="2936523" y="868451"/>
+                  </a:lnTo>
+                  <a:lnTo>
+                    <a:pt x="3008146" y="884193"/>
+                  </a:lnTo>
+                  <a:lnTo>
+                    <a:pt x="3079768" y="899723"/>
+                  </a:lnTo>
+                  <a:lnTo>
+                    <a:pt x="3151391" y="915045"/>
+                  </a:lnTo>
+                  <a:lnTo>
+                    <a:pt x="3223013" y="930161"/>
+                  </a:lnTo>
+                  <a:lnTo>
+                    <a:pt x="3294636" y="945074"/>
+                  </a:lnTo>
+                  <a:lnTo>
+                    <a:pt x="3366258" y="959786"/>
+                  </a:lnTo>
+                  <a:lnTo>
+                    <a:pt x="3437881" y="974301"/>
+                  </a:lnTo>
+                  <a:lnTo>
+                    <a:pt x="3509503" y="988621"/>
+                  </a:lnTo>
+                  <a:lnTo>
+                    <a:pt x="3581126" y="1002748"/>
+                  </a:lnTo>
+                  <a:lnTo>
+                    <a:pt x="3652748" y="1016685"/>
+                  </a:lnTo>
+                  <a:lnTo>
+                    <a:pt x="3724371" y="1030436"/>
+                  </a:lnTo>
+                  <a:lnTo>
+                    <a:pt x="3795993" y="1044001"/>
+                  </a:lnTo>
+                  <a:lnTo>
+                    <a:pt x="3867616" y="1057385"/>
+                  </a:lnTo>
+                  <a:lnTo>
+                    <a:pt x="3939238" y="1070588"/>
+                  </a:lnTo>
+                  <a:lnTo>
+                    <a:pt x="4010861" y="1083614"/>
+                  </a:lnTo>
+                  <a:lnTo>
+                    <a:pt x="4082483" y="1096465"/>
+                  </a:lnTo>
+                  <a:lnTo>
+                    <a:pt x="4154106" y="1109144"/>
+                  </a:lnTo>
+                  <a:lnTo>
+                    <a:pt x="4225729" y="1121652"/>
+                  </a:lnTo>
+                  <a:lnTo>
+                    <a:pt x="4297351" y="1133992"/>
+                  </a:lnTo>
+                  <a:lnTo>
+                    <a:pt x="4368974" y="1146166"/>
+                  </a:lnTo>
+                  <a:lnTo>
+                    <a:pt x="4440596" y="1158177"/>
+                  </a:lnTo>
+                  <a:lnTo>
+                    <a:pt x="4512219" y="1170026"/>
+                  </a:lnTo>
+                  <a:lnTo>
+                    <a:pt x="4583841" y="1181717"/>
+                  </a:lnTo>
+                  <a:lnTo>
+                    <a:pt x="4655464" y="1193250"/>
+                  </a:lnTo>
+                  <a:lnTo>
+                    <a:pt x="4727086" y="1204628"/>
+                  </a:lnTo>
+                  <a:lnTo>
+                    <a:pt x="4798709" y="1211582"/>
+                  </a:lnTo>
+                  <a:lnTo>
+                    <a:pt x="4870331" y="1213497"/>
+                  </a:lnTo>
+                  <a:lnTo>
+                    <a:pt x="4941954" y="1215408"/>
+                  </a:lnTo>
+                  <a:lnTo>
+                    <a:pt x="5013576" y="1217315"/>
+                  </a:lnTo>
+                  <a:lnTo>
+                    <a:pt x="5085199" y="1219217"/>
+                  </a:lnTo>
+                  <a:lnTo>
+                    <a:pt x="5156821" y="1221115"/>
+                  </a:lnTo>
+                  <a:lnTo>
+                    <a:pt x="5228444" y="1223008"/>
+                  </a:lnTo>
+                  <a:lnTo>
+                    <a:pt x="5300066" y="1224897"/>
+                  </a:lnTo>
+                  <a:lnTo>
+                    <a:pt x="5371689" y="1226781"/>
+                  </a:lnTo>
+                  <a:lnTo>
+                    <a:pt x="5443311" y="1228662"/>
+                  </a:lnTo>
+                  <a:lnTo>
+                    <a:pt x="5514934" y="1230537"/>
+                  </a:lnTo>
+                  <a:lnTo>
+                    <a:pt x="5586557" y="1232409"/>
+                  </a:lnTo>
+                  <a:lnTo>
+                    <a:pt x="5658179" y="1234276"/>
+                  </a:lnTo>
+                  <a:lnTo>
+                    <a:pt x="5729802" y="1236139"/>
+                  </a:lnTo>
+                  <a:lnTo>
+                    <a:pt x="5801424" y="1237998"/>
+                  </a:lnTo>
+                  <a:lnTo>
+                    <a:pt x="5873047" y="1239852"/>
+                  </a:lnTo>
+                  <a:lnTo>
+                    <a:pt x="5944669" y="1241702"/>
+                  </a:lnTo>
+                  <a:lnTo>
+                    <a:pt x="6016292" y="1243548"/>
+                  </a:lnTo>
+                  <a:lnTo>
+                    <a:pt x="6087914" y="1245389"/>
+                  </a:lnTo>
+                  <a:lnTo>
+                    <a:pt x="6159537" y="1247226"/>
+                  </a:lnTo>
+                  <a:lnTo>
+                    <a:pt x="6231159" y="1249059"/>
+                  </a:lnTo>
+                  <a:lnTo>
+                    <a:pt x="6302782" y="1250888"/>
+                  </a:lnTo>
+                  <a:lnTo>
+                    <a:pt x="6374404" y="1252712"/>
+                  </a:lnTo>
+                  <a:lnTo>
+                    <a:pt x="6446027" y="1254533"/>
+                  </a:lnTo>
+                  <a:lnTo>
+                    <a:pt x="6517649" y="1256349"/>
+                  </a:lnTo>
+                  <a:lnTo>
+                    <a:pt x="6589272" y="1258161"/>
+                  </a:lnTo>
+                  <a:lnTo>
+                    <a:pt x="6660894" y="1259968"/>
+                  </a:lnTo>
+                  <a:lnTo>
+                    <a:pt x="6732517" y="1261772"/>
+                  </a:lnTo>
+                  <a:lnTo>
+                    <a:pt x="6804139" y="1263571"/>
+                  </a:lnTo>
+                  <a:lnTo>
+                    <a:pt x="6875762" y="1265366"/>
+                  </a:lnTo>
+                  <a:lnTo>
+                    <a:pt x="6947385" y="1267157"/>
+                  </a:lnTo>
+                  <a:lnTo>
+                    <a:pt x="7019007" y="1268944"/>
+                  </a:lnTo>
+                  <a:lnTo>
+                    <a:pt x="7090630" y="1270727"/>
                   </a:lnTo>
                 </a:path>
               </a:pathLst>
@@ -4001,309 +4001,309 @@
           </p:nvSpPr>
           <p:spPr>
             <a:xfrm>
-              <a:off x="1172049" y="4600533"/>
-              <a:ext cx="7090630" cy="419651"/>
+              <a:off x="1172049" y="4589698"/>
+              <a:ext cx="7090630" cy="432847"/>
             </a:xfrm>
             <a:custGeom>
               <a:avLst/>
               <a:pathLst>
-                <a:path w="7090630" h="419651">
+                <a:path w="7090630" h="432847">
                   <a:moveTo>
-                    <a:pt x="7090630" y="419651"/>
+                    <a:pt x="7090630" y="432847"/>
                   </a:moveTo>
                   <a:lnTo>
-                    <a:pt x="7019007" y="412412"/>
-                  </a:lnTo>
-                  <a:lnTo>
-                    <a:pt x="6947385" y="405074"/>
-                  </a:lnTo>
-                  <a:lnTo>
-                    <a:pt x="6875762" y="397638"/>
-                  </a:lnTo>
-                  <a:lnTo>
-                    <a:pt x="6804139" y="390101"/>
-                  </a:lnTo>
-                  <a:lnTo>
-                    <a:pt x="6732517" y="382463"/>
-                  </a:lnTo>
-                  <a:lnTo>
-                    <a:pt x="6660894" y="374722"/>
-                  </a:lnTo>
-                  <a:lnTo>
-                    <a:pt x="6589272" y="366877"/>
-                  </a:lnTo>
-                  <a:lnTo>
-                    <a:pt x="6517649" y="358925"/>
-                  </a:lnTo>
-                  <a:lnTo>
-                    <a:pt x="6446027" y="350867"/>
-                  </a:lnTo>
-                  <a:lnTo>
-                    <a:pt x="6374404" y="342700"/>
-                  </a:lnTo>
-                  <a:lnTo>
-                    <a:pt x="6302782" y="334423"/>
-                  </a:lnTo>
-                  <a:lnTo>
-                    <a:pt x="6231159" y="326034"/>
-                  </a:lnTo>
-                  <a:lnTo>
-                    <a:pt x="6159537" y="317532"/>
-                  </a:lnTo>
-                  <a:lnTo>
-                    <a:pt x="6087914" y="308916"/>
-                  </a:lnTo>
-                  <a:lnTo>
-                    <a:pt x="6016292" y="300183"/>
-                  </a:lnTo>
-                  <a:lnTo>
-                    <a:pt x="5944669" y="291333"/>
-                  </a:lnTo>
-                  <a:lnTo>
-                    <a:pt x="5873047" y="282364"/>
-                  </a:lnTo>
-                  <a:lnTo>
-                    <a:pt x="5801424" y="273273"/>
-                  </a:lnTo>
-                  <a:lnTo>
-                    <a:pt x="5729802" y="264060"/>
-                  </a:lnTo>
-                  <a:lnTo>
-                    <a:pt x="5658179" y="254723"/>
-                  </a:lnTo>
-                  <a:lnTo>
-                    <a:pt x="5586557" y="245260"/>
-                  </a:lnTo>
-                  <a:lnTo>
-                    <a:pt x="5514934" y="235669"/>
-                  </a:lnTo>
-                  <a:lnTo>
-                    <a:pt x="5443311" y="225949"/>
-                  </a:lnTo>
-                  <a:lnTo>
-                    <a:pt x="5371689" y="216098"/>
-                  </a:lnTo>
-                  <a:lnTo>
-                    <a:pt x="5300066" y="206115"/>
-                  </a:lnTo>
-                  <a:lnTo>
-                    <a:pt x="5228444" y="195996"/>
-                  </a:lnTo>
-                  <a:lnTo>
-                    <a:pt x="5156821" y="185741"/>
-                  </a:lnTo>
-                  <a:lnTo>
-                    <a:pt x="5085199" y="175348"/>
-                  </a:lnTo>
-                  <a:lnTo>
-                    <a:pt x="5013576" y="164815"/>
-                  </a:lnTo>
-                  <a:lnTo>
-                    <a:pt x="4941954" y="154140"/>
-                  </a:lnTo>
-                  <a:lnTo>
-                    <a:pt x="4870331" y="143321"/>
-                  </a:lnTo>
-                  <a:lnTo>
-                    <a:pt x="4798709" y="132357"/>
-                  </a:lnTo>
-                  <a:lnTo>
-                    <a:pt x="4727086" y="126293"/>
-                  </a:lnTo>
-                  <a:lnTo>
-                    <a:pt x="4655464" y="124510"/>
-                  </a:lnTo>
-                  <a:lnTo>
-                    <a:pt x="4583841" y="122723"/>
-                  </a:lnTo>
-                  <a:lnTo>
-                    <a:pt x="4512219" y="120932"/>
-                  </a:lnTo>
-                  <a:lnTo>
-                    <a:pt x="4440596" y="119137"/>
-                  </a:lnTo>
-                  <a:lnTo>
-                    <a:pt x="4368974" y="117339"/>
-                  </a:lnTo>
-                  <a:lnTo>
-                    <a:pt x="4297351" y="115536"/>
-                  </a:lnTo>
-                  <a:lnTo>
-                    <a:pt x="4225729" y="113730"/>
-                  </a:lnTo>
-                  <a:lnTo>
-                    <a:pt x="4154106" y="111920"/>
-                  </a:lnTo>
-                  <a:lnTo>
-                    <a:pt x="4082483" y="110106"/>
-                  </a:lnTo>
-                  <a:lnTo>
-                    <a:pt x="4010861" y="108288"/>
-                  </a:lnTo>
-                  <a:lnTo>
-                    <a:pt x="3939238" y="106466"/>
-                  </a:lnTo>
-                  <a:lnTo>
-                    <a:pt x="3867616" y="104640"/>
-                  </a:lnTo>
-                  <a:lnTo>
-                    <a:pt x="3795993" y="102810"/>
-                  </a:lnTo>
-                  <a:lnTo>
-                    <a:pt x="3724371" y="100977"/>
-                  </a:lnTo>
-                  <a:lnTo>
-                    <a:pt x="3652748" y="99139"/>
-                  </a:lnTo>
-                  <a:lnTo>
-                    <a:pt x="3581126" y="97298"/>
-                  </a:lnTo>
-                  <a:lnTo>
-                    <a:pt x="3509503" y="95452"/>
-                  </a:lnTo>
-                  <a:lnTo>
-                    <a:pt x="3437881" y="93603"/>
-                  </a:lnTo>
-                  <a:lnTo>
-                    <a:pt x="3366258" y="91749"/>
-                  </a:lnTo>
-                  <a:lnTo>
-                    <a:pt x="3294636" y="89892"/>
-                  </a:lnTo>
-                  <a:lnTo>
-                    <a:pt x="3223013" y="88031"/>
-                  </a:lnTo>
-                  <a:lnTo>
-                    <a:pt x="3151391" y="86165"/>
-                  </a:lnTo>
-                  <a:lnTo>
-                    <a:pt x="3079768" y="84296"/>
-                  </a:lnTo>
-                  <a:lnTo>
-                    <a:pt x="3008146" y="82423"/>
-                  </a:lnTo>
-                  <a:lnTo>
-                    <a:pt x="2936523" y="80545"/>
-                  </a:lnTo>
-                  <a:lnTo>
-                    <a:pt x="2864901" y="78664"/>
-                  </a:lnTo>
-                  <a:lnTo>
-                    <a:pt x="2793278" y="76778"/>
-                  </a:lnTo>
-                  <a:lnTo>
-                    <a:pt x="2721655" y="74889"/>
-                  </a:lnTo>
-                  <a:lnTo>
-                    <a:pt x="2650033" y="72995"/>
-                  </a:lnTo>
-                  <a:lnTo>
-                    <a:pt x="2578410" y="71098"/>
-                  </a:lnTo>
-                  <a:lnTo>
-                    <a:pt x="2506788" y="69196"/>
-                  </a:lnTo>
-                  <a:lnTo>
-                    <a:pt x="2435165" y="67290"/>
-                  </a:lnTo>
-                  <a:lnTo>
-                    <a:pt x="2363543" y="65380"/>
-                  </a:lnTo>
-                  <a:lnTo>
-                    <a:pt x="2291920" y="63466"/>
-                  </a:lnTo>
-                  <a:lnTo>
-                    <a:pt x="2220298" y="61548"/>
-                  </a:lnTo>
-                  <a:lnTo>
-                    <a:pt x="2148675" y="59626"/>
-                  </a:lnTo>
-                  <a:lnTo>
-                    <a:pt x="2077053" y="57700"/>
-                  </a:lnTo>
-                  <a:lnTo>
-                    <a:pt x="2005430" y="55769"/>
-                  </a:lnTo>
-                  <a:lnTo>
-                    <a:pt x="1933808" y="53834"/>
-                  </a:lnTo>
-                  <a:lnTo>
-                    <a:pt x="1862185" y="51896"/>
-                  </a:lnTo>
-                  <a:lnTo>
-                    <a:pt x="1790563" y="49953"/>
-                  </a:lnTo>
-                  <a:lnTo>
-                    <a:pt x="1718940" y="48006"/>
-                  </a:lnTo>
-                  <a:lnTo>
-                    <a:pt x="1647318" y="46054"/>
-                  </a:lnTo>
-                  <a:lnTo>
-                    <a:pt x="1575695" y="44099"/>
-                  </a:lnTo>
-                  <a:lnTo>
-                    <a:pt x="1504073" y="42139"/>
-                  </a:lnTo>
-                  <a:lnTo>
-                    <a:pt x="1432450" y="40175"/>
-                  </a:lnTo>
-                  <a:lnTo>
-                    <a:pt x="1360827" y="38207"/>
-                  </a:lnTo>
-                  <a:lnTo>
-                    <a:pt x="1289205" y="36235"/>
-                  </a:lnTo>
-                  <a:lnTo>
-                    <a:pt x="1217582" y="34258"/>
-                  </a:lnTo>
-                  <a:lnTo>
-                    <a:pt x="1145960" y="32277"/>
-                  </a:lnTo>
-                  <a:lnTo>
-                    <a:pt x="1074337" y="30292"/>
-                  </a:lnTo>
-                  <a:lnTo>
-                    <a:pt x="1002715" y="28303"/>
-                  </a:lnTo>
-                  <a:lnTo>
-                    <a:pt x="931092" y="26309"/>
-                  </a:lnTo>
-                  <a:lnTo>
-                    <a:pt x="859470" y="24311"/>
-                  </a:lnTo>
-                  <a:lnTo>
-                    <a:pt x="787847" y="22309"/>
-                  </a:lnTo>
-                  <a:lnTo>
-                    <a:pt x="716225" y="20303"/>
-                  </a:lnTo>
-                  <a:lnTo>
-                    <a:pt x="644602" y="18292"/>
-                  </a:lnTo>
-                  <a:lnTo>
-                    <a:pt x="572980" y="16277"/>
-                  </a:lnTo>
-                  <a:lnTo>
-                    <a:pt x="501357" y="14257"/>
-                  </a:lnTo>
-                  <a:lnTo>
-                    <a:pt x="429735" y="12234"/>
-                  </a:lnTo>
-                  <a:lnTo>
-                    <a:pt x="358112" y="10206"/>
-                  </a:lnTo>
-                  <a:lnTo>
-                    <a:pt x="286490" y="8173"/>
-                  </a:lnTo>
-                  <a:lnTo>
-                    <a:pt x="214867" y="6136"/>
-                  </a:lnTo>
-                  <a:lnTo>
-                    <a:pt x="143245" y="4095"/>
-                  </a:lnTo>
-                  <a:lnTo>
-                    <a:pt x="71622" y="2049"/>
+                    <a:pt x="7019007" y="425566"/>
+                  </a:lnTo>
+                  <a:lnTo>
+                    <a:pt x="6947385" y="418185"/>
+                  </a:lnTo>
+                  <a:lnTo>
+                    <a:pt x="6875762" y="410704"/>
+                  </a:lnTo>
+                  <a:lnTo>
+                    <a:pt x="6804139" y="403121"/>
+                  </a:lnTo>
+                  <a:lnTo>
+                    <a:pt x="6732517" y="395434"/>
+                  </a:lnTo>
+                  <a:lnTo>
+                    <a:pt x="6660894" y="387643"/>
+                  </a:lnTo>
+                  <a:lnTo>
+                    <a:pt x="6589272" y="379746"/>
+                  </a:lnTo>
+                  <a:lnTo>
+                    <a:pt x="6517649" y="371742"/>
+                  </a:lnTo>
+                  <a:lnTo>
+                    <a:pt x="6446027" y="363628"/>
+                  </a:lnTo>
+                  <a:lnTo>
+                    <a:pt x="6374404" y="355404"/>
+                  </a:lnTo>
+                  <a:lnTo>
+                    <a:pt x="6302782" y="347068"/>
+                  </a:lnTo>
+                  <a:lnTo>
+                    <a:pt x="6231159" y="338618"/>
+                  </a:lnTo>
+                  <a:lnTo>
+                    <a:pt x="6159537" y="330053"/>
+                  </a:lnTo>
+                  <a:lnTo>
+                    <a:pt x="6087914" y="321372"/>
+                  </a:lnTo>
+                  <a:lnTo>
+                    <a:pt x="6016292" y="312572"/>
+                  </a:lnTo>
+                  <a:lnTo>
+                    <a:pt x="5944669" y="303653"/>
+                  </a:lnTo>
+                  <a:lnTo>
+                    <a:pt x="5873047" y="294612"/>
+                  </a:lnTo>
+                  <a:lnTo>
+                    <a:pt x="5801424" y="285448"/>
+                  </a:lnTo>
+                  <a:lnTo>
+                    <a:pt x="5729802" y="276159"/>
+                  </a:lnTo>
+                  <a:lnTo>
+                    <a:pt x="5658179" y="266744"/>
+                  </a:lnTo>
+                  <a:lnTo>
+                    <a:pt x="5586557" y="257200"/>
+                  </a:lnTo>
+                  <a:lnTo>
+                    <a:pt x="5514934" y="247527"/>
+                  </a:lnTo>
+                  <a:lnTo>
+                    <a:pt x="5443311" y="237722"/>
+                  </a:lnTo>
+                  <a:lnTo>
+                    <a:pt x="5371689" y="227783"/>
+                  </a:lnTo>
+                  <a:lnTo>
+                    <a:pt x="5300066" y="217709"/>
+                  </a:lnTo>
+                  <a:lnTo>
+                    <a:pt x="5228444" y="207498"/>
+                  </a:lnTo>
+                  <a:lnTo>
+                    <a:pt x="5156821" y="197147"/>
+                  </a:lnTo>
+                  <a:lnTo>
+                    <a:pt x="5085199" y="186656"/>
+                  </a:lnTo>
+                  <a:lnTo>
+                    <a:pt x="5013576" y="176022"/>
+                  </a:lnTo>
+                  <a:lnTo>
+                    <a:pt x="4941954" y="165243"/>
+                  </a:lnTo>
+                  <a:lnTo>
+                    <a:pt x="4870331" y="154317"/>
+                  </a:lnTo>
+                  <a:lnTo>
+                    <a:pt x="4798709" y="143243"/>
+                  </a:lnTo>
+                  <a:lnTo>
+                    <a:pt x="4727086" y="137052"/>
+                  </a:lnTo>
+                  <a:lnTo>
+                    <a:pt x="4655464" y="135128"/>
+                  </a:lnTo>
+                  <a:lnTo>
+                    <a:pt x="4583841" y="133199"/>
+                  </a:lnTo>
+                  <a:lnTo>
+                    <a:pt x="4512219" y="131266"/>
+                  </a:lnTo>
+                  <a:lnTo>
+                    <a:pt x="4440596" y="129328"/>
+                  </a:lnTo>
+                  <a:lnTo>
+                    <a:pt x="4368974" y="127386"/>
+                  </a:lnTo>
+                  <a:lnTo>
+                    <a:pt x="4297351" y="125440"/>
+                  </a:lnTo>
+                  <a:lnTo>
+                    <a:pt x="4225729" y="123488"/>
+                  </a:lnTo>
+                  <a:lnTo>
+                    <a:pt x="4154106" y="121533"/>
+                  </a:lnTo>
+                  <a:lnTo>
+                    <a:pt x="4082483" y="119573"/>
+                  </a:lnTo>
+                  <a:lnTo>
+                    <a:pt x="4010861" y="117608"/>
+                  </a:lnTo>
+                  <a:lnTo>
+                    <a:pt x="3939238" y="115639"/>
+                  </a:lnTo>
+                  <a:lnTo>
+                    <a:pt x="3867616" y="113665"/>
+                  </a:lnTo>
+                  <a:lnTo>
+                    <a:pt x="3795993" y="111686"/>
+                  </a:lnTo>
+                  <a:lnTo>
+                    <a:pt x="3724371" y="109703"/>
+                  </a:lnTo>
+                  <a:lnTo>
+                    <a:pt x="3652748" y="107716"/>
+                  </a:lnTo>
+                  <a:lnTo>
+                    <a:pt x="3581126" y="105724"/>
+                  </a:lnTo>
+                  <a:lnTo>
+                    <a:pt x="3509503" y="103727"/>
+                  </a:lnTo>
+                  <a:lnTo>
+                    <a:pt x="3437881" y="101725"/>
+                  </a:lnTo>
+                  <a:lnTo>
+                    <a:pt x="3366258" y="99719"/>
+                  </a:lnTo>
+                  <a:lnTo>
+                    <a:pt x="3294636" y="97708"/>
+                  </a:lnTo>
+                  <a:lnTo>
+                    <a:pt x="3223013" y="95693"/>
+                  </a:lnTo>
+                  <a:lnTo>
+                    <a:pt x="3151391" y="93673"/>
+                  </a:lnTo>
+                  <a:lnTo>
+                    <a:pt x="3079768" y="91648"/>
+                  </a:lnTo>
+                  <a:lnTo>
+                    <a:pt x="3008146" y="89619"/>
+                  </a:lnTo>
+                  <a:lnTo>
+                    <a:pt x="2936523" y="87585"/>
+                  </a:lnTo>
+                  <a:lnTo>
+                    <a:pt x="2864901" y="85546"/>
+                  </a:lnTo>
+                  <a:lnTo>
+                    <a:pt x="2793278" y="83502"/>
+                  </a:lnTo>
+                  <a:lnTo>
+                    <a:pt x="2721655" y="81454"/>
+                  </a:lnTo>
+                  <a:lnTo>
+                    <a:pt x="2650033" y="79401"/>
+                  </a:lnTo>
+                  <a:lnTo>
+                    <a:pt x="2578410" y="77343"/>
+                  </a:lnTo>
+                  <a:lnTo>
+                    <a:pt x="2506788" y="75281"/>
+                  </a:lnTo>
+                  <a:lnTo>
+                    <a:pt x="2435165" y="73213"/>
+                  </a:lnTo>
+                  <a:lnTo>
+                    <a:pt x="2363543" y="71141"/>
+                  </a:lnTo>
+                  <a:lnTo>
+                    <a:pt x="2291920" y="69064"/>
+                  </a:lnTo>
+                  <a:lnTo>
+                    <a:pt x="2220298" y="66982"/>
+                  </a:lnTo>
+                  <a:lnTo>
+                    <a:pt x="2148675" y="64896"/>
+                  </a:lnTo>
+                  <a:lnTo>
+                    <a:pt x="2077053" y="62805"/>
+                  </a:lnTo>
+                  <a:lnTo>
+                    <a:pt x="2005430" y="60708"/>
+                  </a:lnTo>
+                  <a:lnTo>
+                    <a:pt x="1933808" y="58607"/>
+                  </a:lnTo>
+                  <a:lnTo>
+                    <a:pt x="1862185" y="56501"/>
+                  </a:lnTo>
+                  <a:lnTo>
+                    <a:pt x="1790563" y="54390"/>
+                  </a:lnTo>
+                  <a:lnTo>
+                    <a:pt x="1718940" y="52275"/>
+                  </a:lnTo>
+                  <a:lnTo>
+                    <a:pt x="1647318" y="50154"/>
+                  </a:lnTo>
+                  <a:lnTo>
+                    <a:pt x="1575695" y="48028"/>
+                  </a:lnTo>
+                  <a:lnTo>
+                    <a:pt x="1504073" y="45898"/>
+                  </a:lnTo>
+                  <a:lnTo>
+                    <a:pt x="1432450" y="43762"/>
+                  </a:lnTo>
+                  <a:lnTo>
+                    <a:pt x="1360827" y="41622"/>
+                  </a:lnTo>
+                  <a:lnTo>
+                    <a:pt x="1289205" y="39477"/>
+                  </a:lnTo>
+                  <a:lnTo>
+                    <a:pt x="1217582" y="37326"/>
+                  </a:lnTo>
+                  <a:lnTo>
+                    <a:pt x="1145960" y="35171"/>
+                  </a:lnTo>
+                  <a:lnTo>
+                    <a:pt x="1074337" y="33011"/>
+                  </a:lnTo>
+                  <a:lnTo>
+                    <a:pt x="1002715" y="30846"/>
+                  </a:lnTo>
+                  <a:lnTo>
+                    <a:pt x="931092" y="28675"/>
+                  </a:lnTo>
+                  <a:lnTo>
+                    <a:pt x="859470" y="26500"/>
+                  </a:lnTo>
+                  <a:lnTo>
+                    <a:pt x="787847" y="24320"/>
+                  </a:lnTo>
+                  <a:lnTo>
+                    <a:pt x="716225" y="22134"/>
+                  </a:lnTo>
+                  <a:lnTo>
+                    <a:pt x="644602" y="19944"/>
+                  </a:lnTo>
+                  <a:lnTo>
+                    <a:pt x="572980" y="17748"/>
+                  </a:lnTo>
+                  <a:lnTo>
+                    <a:pt x="501357" y="15547"/>
+                  </a:lnTo>
+                  <a:lnTo>
+                    <a:pt x="429735" y="13342"/>
+                  </a:lnTo>
+                  <a:lnTo>
+                    <a:pt x="358112" y="11131"/>
+                  </a:lnTo>
+                  <a:lnTo>
+                    <a:pt x="286490" y="8915"/>
+                  </a:lnTo>
+                  <a:lnTo>
+                    <a:pt x="214867" y="6694"/>
+                  </a:lnTo>
+                  <a:lnTo>
+                    <a:pt x="143245" y="4468"/>
+                  </a:lnTo>
+                  <a:lnTo>
+                    <a:pt x="71622" y="2236"/>
                   </a:lnTo>
                   <a:lnTo>
                     <a:pt x="0" y="0"/>
@@ -4326,312 +4326,312 @@
           </p:nvSpPr>
           <p:spPr>
             <a:xfrm>
-              <a:off x="1172049" y="4166455"/>
-              <a:ext cx="7090630" cy="746191"/>
+              <a:off x="1172049" y="4152272"/>
+              <a:ext cx="7090630" cy="763557"/>
             </a:xfrm>
             <a:custGeom>
               <a:avLst/>
               <a:pathLst>
-                <a:path w="7090630" h="746191">
+                <a:path w="7090630" h="763557">
                   <a:moveTo>
                     <a:pt x="0" y="0"/>
                   </a:moveTo>
                   <a:lnTo>
-                    <a:pt x="71622" y="10761"/>
-                  </a:lnTo>
-                  <a:lnTo>
-                    <a:pt x="143245" y="21439"/>
-                  </a:lnTo>
-                  <a:lnTo>
-                    <a:pt x="214867" y="32034"/>
-                  </a:lnTo>
-                  <a:lnTo>
-                    <a:pt x="286490" y="42548"/>
-                  </a:lnTo>
-                  <a:lnTo>
-                    <a:pt x="358112" y="52980"/>
-                  </a:lnTo>
-                  <a:lnTo>
-                    <a:pt x="429735" y="63331"/>
-                  </a:lnTo>
-                  <a:lnTo>
-                    <a:pt x="501357" y="73603"/>
-                  </a:lnTo>
-                  <a:lnTo>
-                    <a:pt x="572980" y="83795"/>
-                  </a:lnTo>
-                  <a:lnTo>
-                    <a:pt x="644602" y="93907"/>
-                  </a:lnTo>
-                  <a:lnTo>
-                    <a:pt x="716225" y="103942"/>
-                  </a:lnTo>
-                  <a:lnTo>
-                    <a:pt x="787847" y="113899"/>
-                  </a:lnTo>
-                  <a:lnTo>
-                    <a:pt x="859470" y="123779"/>
-                  </a:lnTo>
-                  <a:lnTo>
-                    <a:pt x="931092" y="133583"/>
-                  </a:lnTo>
-                  <a:lnTo>
-                    <a:pt x="1002715" y="143311"/>
-                  </a:lnTo>
-                  <a:lnTo>
-                    <a:pt x="1074337" y="152963"/>
-                  </a:lnTo>
-                  <a:lnTo>
-                    <a:pt x="1145960" y="162541"/>
-                  </a:lnTo>
-                  <a:lnTo>
-                    <a:pt x="1217582" y="172045"/>
-                  </a:lnTo>
-                  <a:lnTo>
-                    <a:pt x="1289205" y="181475"/>
-                  </a:lnTo>
-                  <a:lnTo>
-                    <a:pt x="1360827" y="190832"/>
-                  </a:lnTo>
-                  <a:lnTo>
-                    <a:pt x="1432450" y="200117"/>
-                  </a:lnTo>
-                  <a:lnTo>
-                    <a:pt x="1504073" y="209330"/>
-                  </a:lnTo>
-                  <a:lnTo>
-                    <a:pt x="1575695" y="218471"/>
-                  </a:lnTo>
-                  <a:lnTo>
-                    <a:pt x="1647318" y="227542"/>
-                  </a:lnTo>
-                  <a:lnTo>
-                    <a:pt x="1718940" y="236543"/>
-                  </a:lnTo>
-                  <a:lnTo>
-                    <a:pt x="1790563" y="245474"/>
-                  </a:lnTo>
-                  <a:lnTo>
-                    <a:pt x="1862185" y="254336"/>
-                  </a:lnTo>
-                  <a:lnTo>
-                    <a:pt x="1933808" y="263129"/>
-                  </a:lnTo>
-                  <a:lnTo>
-                    <a:pt x="2005430" y="271855"/>
-                  </a:lnTo>
-                  <a:lnTo>
-                    <a:pt x="2077053" y="280512"/>
-                  </a:lnTo>
-                  <a:lnTo>
-                    <a:pt x="2148675" y="289103"/>
-                  </a:lnTo>
-                  <a:lnTo>
-                    <a:pt x="2220298" y="297628"/>
-                  </a:lnTo>
-                  <a:lnTo>
-                    <a:pt x="2291920" y="306086"/>
-                  </a:lnTo>
-                  <a:lnTo>
-                    <a:pt x="2363543" y="314479"/>
-                  </a:lnTo>
-                  <a:lnTo>
-                    <a:pt x="2435165" y="322807"/>
-                  </a:lnTo>
-                  <a:lnTo>
-                    <a:pt x="2506788" y="331071"/>
-                  </a:lnTo>
-                  <a:lnTo>
-                    <a:pt x="2578410" y="339270"/>
-                  </a:lnTo>
-                  <a:lnTo>
-                    <a:pt x="2650033" y="347407"/>
-                  </a:lnTo>
-                  <a:lnTo>
-                    <a:pt x="2721655" y="355480"/>
-                  </a:lnTo>
-                  <a:lnTo>
-                    <a:pt x="2793278" y="363491"/>
-                  </a:lnTo>
-                  <a:lnTo>
-                    <a:pt x="2864901" y="371440"/>
-                  </a:lnTo>
-                  <a:lnTo>
-                    <a:pt x="2936523" y="379327"/>
-                  </a:lnTo>
-                  <a:lnTo>
-                    <a:pt x="3008146" y="387153"/>
-                  </a:lnTo>
-                  <a:lnTo>
-                    <a:pt x="3079768" y="394919"/>
-                  </a:lnTo>
-                  <a:lnTo>
-                    <a:pt x="3151391" y="402624"/>
-                  </a:lnTo>
-                  <a:lnTo>
-                    <a:pt x="3223013" y="410270"/>
-                  </a:lnTo>
-                  <a:lnTo>
-                    <a:pt x="3294636" y="417857"/>
-                  </a:lnTo>
-                  <a:lnTo>
-                    <a:pt x="3366258" y="425385"/>
-                  </a:lnTo>
-                  <a:lnTo>
-                    <a:pt x="3437881" y="432855"/>
-                  </a:lnTo>
-                  <a:lnTo>
-                    <a:pt x="3509503" y="440267"/>
-                  </a:lnTo>
-                  <a:lnTo>
-                    <a:pt x="3581126" y="447622"/>
-                  </a:lnTo>
-                  <a:lnTo>
-                    <a:pt x="3652748" y="454920"/>
-                  </a:lnTo>
-                  <a:lnTo>
-                    <a:pt x="3724371" y="462161"/>
-                  </a:lnTo>
-                  <a:lnTo>
-                    <a:pt x="3795993" y="469347"/>
-                  </a:lnTo>
-                  <a:lnTo>
-                    <a:pt x="3867616" y="476477"/>
-                  </a:lnTo>
-                  <a:lnTo>
-                    <a:pt x="3939238" y="483551"/>
-                  </a:lnTo>
-                  <a:lnTo>
-                    <a:pt x="4010861" y="490571"/>
-                  </a:lnTo>
-                  <a:lnTo>
-                    <a:pt x="4082483" y="497536"/>
-                  </a:lnTo>
-                  <a:lnTo>
-                    <a:pt x="4154106" y="504448"/>
-                  </a:lnTo>
-                  <a:lnTo>
-                    <a:pt x="4225729" y="511306"/>
-                  </a:lnTo>
-                  <a:lnTo>
-                    <a:pt x="4297351" y="518111"/>
-                  </a:lnTo>
-                  <a:lnTo>
-                    <a:pt x="4368974" y="524864"/>
-                  </a:lnTo>
-                  <a:lnTo>
-                    <a:pt x="4440596" y="531564"/>
-                  </a:lnTo>
-                  <a:lnTo>
-                    <a:pt x="4512219" y="538212"/>
-                  </a:lnTo>
-                  <a:lnTo>
-                    <a:pt x="4583841" y="544809"/>
-                  </a:lnTo>
-                  <a:lnTo>
-                    <a:pt x="4655464" y="551355"/>
-                  </a:lnTo>
-                  <a:lnTo>
-                    <a:pt x="4727086" y="557850"/>
-                  </a:lnTo>
-                  <a:lnTo>
-                    <a:pt x="4798709" y="564295"/>
-                  </a:lnTo>
-                  <a:lnTo>
-                    <a:pt x="4870331" y="570690"/>
-                  </a:lnTo>
-                  <a:lnTo>
-                    <a:pt x="4941954" y="577036"/>
-                  </a:lnTo>
-                  <a:lnTo>
-                    <a:pt x="5013576" y="583332"/>
-                  </a:lnTo>
-                  <a:lnTo>
-                    <a:pt x="5085199" y="589580"/>
-                  </a:lnTo>
-                  <a:lnTo>
-                    <a:pt x="5156821" y="595780"/>
-                  </a:lnTo>
-                  <a:lnTo>
-                    <a:pt x="5228444" y="601931"/>
-                  </a:lnTo>
-                  <a:lnTo>
-                    <a:pt x="5300066" y="608035"/>
-                  </a:lnTo>
-                  <a:lnTo>
-                    <a:pt x="5371689" y="614092"/>
-                  </a:lnTo>
-                  <a:lnTo>
-                    <a:pt x="5443311" y="620101"/>
-                  </a:lnTo>
-                  <a:lnTo>
-                    <a:pt x="5514934" y="626065"/>
-                  </a:lnTo>
-                  <a:lnTo>
-                    <a:pt x="5586557" y="631982"/>
-                  </a:lnTo>
-                  <a:lnTo>
-                    <a:pt x="5658179" y="637853"/>
-                  </a:lnTo>
-                  <a:lnTo>
-                    <a:pt x="5729802" y="643679"/>
-                  </a:lnTo>
-                  <a:lnTo>
-                    <a:pt x="5801424" y="649460"/>
-                  </a:lnTo>
-                  <a:lnTo>
-                    <a:pt x="5873047" y="655196"/>
-                  </a:lnTo>
-                  <a:lnTo>
-                    <a:pt x="5944669" y="660888"/>
-                  </a:lnTo>
-                  <a:lnTo>
-                    <a:pt x="6016292" y="666535"/>
-                  </a:lnTo>
-                  <a:lnTo>
-                    <a:pt x="6087914" y="672139"/>
-                  </a:lnTo>
-                  <a:lnTo>
-                    <a:pt x="6159537" y="677700"/>
-                  </a:lnTo>
-                  <a:lnTo>
-                    <a:pt x="6231159" y="683218"/>
-                  </a:lnTo>
-                  <a:lnTo>
-                    <a:pt x="6302782" y="688692"/>
-                  </a:lnTo>
-                  <a:lnTo>
-                    <a:pt x="6374404" y="694125"/>
-                  </a:lnTo>
-                  <a:lnTo>
-                    <a:pt x="6446027" y="699516"/>
-                  </a:lnTo>
-                  <a:lnTo>
-                    <a:pt x="6517649" y="704864"/>
-                  </a:lnTo>
-                  <a:lnTo>
-                    <a:pt x="6589272" y="710172"/>
-                  </a:lnTo>
-                  <a:lnTo>
-                    <a:pt x="6660894" y="715438"/>
-                  </a:lnTo>
-                  <a:lnTo>
-                    <a:pt x="6732517" y="720664"/>
-                  </a:lnTo>
-                  <a:lnTo>
-                    <a:pt x="6804139" y="725849"/>
-                  </a:lnTo>
-                  <a:lnTo>
-                    <a:pt x="6875762" y="730994"/>
-                  </a:lnTo>
-                  <a:lnTo>
-                    <a:pt x="6947385" y="736099"/>
-                  </a:lnTo>
-                  <a:lnTo>
-                    <a:pt x="7019007" y="741165"/>
-                  </a:lnTo>
-                  <a:lnTo>
-                    <a:pt x="7090630" y="746191"/>
+                    <a:pt x="71622" y="11083"/>
+                  </a:lnTo>
+                  <a:lnTo>
+                    <a:pt x="143245" y="22079"/>
+                  </a:lnTo>
+                  <a:lnTo>
+                    <a:pt x="214867" y="32989"/>
+                  </a:lnTo>
+                  <a:lnTo>
+                    <a:pt x="286490" y="43812"/>
+                  </a:lnTo>
+                  <a:lnTo>
+                    <a:pt x="358112" y="54550"/>
+                  </a:lnTo>
+                  <a:lnTo>
+                    <a:pt x="429735" y="65204"/>
+                  </a:lnTo>
+                  <a:lnTo>
+                    <a:pt x="501357" y="75773"/>
+                  </a:lnTo>
+                  <a:lnTo>
+                    <a:pt x="572980" y="86259"/>
+                  </a:lnTo>
+                  <a:lnTo>
+                    <a:pt x="644602" y="96662"/>
+                  </a:lnTo>
+                  <a:lnTo>
+                    <a:pt x="716225" y="106983"/>
+                  </a:lnTo>
+                  <a:lnTo>
+                    <a:pt x="787847" y="117223"/>
+                  </a:lnTo>
+                  <a:lnTo>
+                    <a:pt x="859470" y="127381"/>
+                  </a:lnTo>
+                  <a:lnTo>
+                    <a:pt x="931092" y="137460"/>
+                  </a:lnTo>
+                  <a:lnTo>
+                    <a:pt x="1002715" y="147459"/>
+                  </a:lnTo>
+                  <a:lnTo>
+                    <a:pt x="1074337" y="157380"/>
+                  </a:lnTo>
+                  <a:lnTo>
+                    <a:pt x="1145960" y="167222"/>
+                  </a:lnTo>
+                  <a:lnTo>
+                    <a:pt x="1217582" y="176986"/>
+                  </a:lnTo>
+                  <a:lnTo>
+                    <a:pt x="1289205" y="186674"/>
+                  </a:lnTo>
+                  <a:lnTo>
+                    <a:pt x="1360827" y="196285"/>
+                  </a:lnTo>
+                  <a:lnTo>
+                    <a:pt x="1432450" y="205820"/>
+                  </a:lnTo>
+                  <a:lnTo>
+                    <a:pt x="1504073" y="215280"/>
+                  </a:lnTo>
+                  <a:lnTo>
+                    <a:pt x="1575695" y="224665"/>
+                  </a:lnTo>
+                  <a:lnTo>
+                    <a:pt x="1647318" y="233977"/>
+                  </a:lnTo>
+                  <a:lnTo>
+                    <a:pt x="1718940" y="243214"/>
+                  </a:lnTo>
+                  <a:lnTo>
+                    <a:pt x="1790563" y="252379"/>
+                  </a:lnTo>
+                  <a:lnTo>
+                    <a:pt x="1862185" y="261472"/>
+                  </a:lnTo>
+                  <a:lnTo>
+                    <a:pt x="1933808" y="270493"/>
+                  </a:lnTo>
+                  <a:lnTo>
+                    <a:pt x="2005430" y="279443"/>
+                  </a:lnTo>
+                  <a:lnTo>
+                    <a:pt x="2077053" y="288322"/>
+                  </a:lnTo>
+                  <a:lnTo>
+                    <a:pt x="2148675" y="297131"/>
+                  </a:lnTo>
+                  <a:lnTo>
+                    <a:pt x="2220298" y="305871"/>
+                  </a:lnTo>
+                  <a:lnTo>
+                    <a:pt x="2291920" y="314541"/>
+                  </a:lnTo>
+                  <a:lnTo>
+                    <a:pt x="2363543" y="323143"/>
+                  </a:lnTo>
+                  <a:lnTo>
+                    <a:pt x="2435165" y="331678"/>
+                  </a:lnTo>
+                  <a:lnTo>
+                    <a:pt x="2506788" y="340145"/>
+                  </a:lnTo>
+                  <a:lnTo>
+                    <a:pt x="2578410" y="348545"/>
+                  </a:lnTo>
+                  <a:lnTo>
+                    <a:pt x="2650033" y="356879"/>
+                  </a:lnTo>
+                  <a:lnTo>
+                    <a:pt x="2721655" y="365148"/>
+                  </a:lnTo>
+                  <a:lnTo>
+                    <a:pt x="2793278" y="373351"/>
+                  </a:lnTo>
+                  <a:lnTo>
+                    <a:pt x="2864901" y="381489"/>
+                  </a:lnTo>
+                  <a:lnTo>
+                    <a:pt x="2936523" y="389563"/>
+                  </a:lnTo>
+                  <a:lnTo>
+                    <a:pt x="3008146" y="397574"/>
+                  </a:lnTo>
+                  <a:lnTo>
+                    <a:pt x="3079768" y="405521"/>
+                  </a:lnTo>
+                  <a:lnTo>
+                    <a:pt x="3151391" y="413405"/>
+                  </a:lnTo>
+                  <a:lnTo>
+                    <a:pt x="3223013" y="421228"/>
+                  </a:lnTo>
+                  <a:lnTo>
+                    <a:pt x="3294636" y="428988"/>
+                  </a:lnTo>
+                  <a:lnTo>
+                    <a:pt x="3366258" y="436688"/>
+                  </a:lnTo>
+                  <a:lnTo>
+                    <a:pt x="3437881" y="444326"/>
+                  </a:lnTo>
+                  <a:lnTo>
+                    <a:pt x="3509503" y="451905"/>
+                  </a:lnTo>
+                  <a:lnTo>
+                    <a:pt x="3581126" y="459423"/>
+                  </a:lnTo>
+                  <a:lnTo>
+                    <a:pt x="3652748" y="466883"/>
+                  </a:lnTo>
+                  <a:lnTo>
+                    <a:pt x="3724371" y="474283"/>
+                  </a:lnTo>
+                  <a:lnTo>
+                    <a:pt x="3795993" y="481625"/>
+                  </a:lnTo>
+                  <a:lnTo>
+                    <a:pt x="3867616" y="488910"/>
+                  </a:lnTo>
+                  <a:lnTo>
+                    <a:pt x="3939238" y="496136"/>
+                  </a:lnTo>
+                  <a:lnTo>
+                    <a:pt x="4010861" y="503306"/>
+                  </a:lnTo>
+                  <a:lnTo>
+                    <a:pt x="4082483" y="510419"/>
+                  </a:lnTo>
+                  <a:lnTo>
+                    <a:pt x="4154106" y="517476"/>
+                  </a:lnTo>
+                  <a:lnTo>
+                    <a:pt x="4225729" y="524477"/>
+                  </a:lnTo>
+                  <a:lnTo>
+                    <a:pt x="4297351" y="531424"/>
+                  </a:lnTo>
+                  <a:lnTo>
+                    <a:pt x="4368974" y="538315"/>
+                  </a:lnTo>
+                  <a:lnTo>
+                    <a:pt x="4440596" y="545152"/>
+                  </a:lnTo>
+                  <a:lnTo>
+                    <a:pt x="4512219" y="551935"/>
+                  </a:lnTo>
+                  <a:lnTo>
+                    <a:pt x="4583841" y="558664"/>
+                  </a:lnTo>
+                  <a:lnTo>
+                    <a:pt x="4655464" y="565341"/>
+                  </a:lnTo>
+                  <a:lnTo>
+                    <a:pt x="4727086" y="571965"/>
+                  </a:lnTo>
+                  <a:lnTo>
+                    <a:pt x="4798709" y="578536"/>
+                  </a:lnTo>
+                  <a:lnTo>
+                    <a:pt x="4870331" y="585056"/>
+                  </a:lnTo>
+                  <a:lnTo>
+                    <a:pt x="4941954" y="591524"/>
+                  </a:lnTo>
+                  <a:lnTo>
+                    <a:pt x="5013576" y="597941"/>
+                  </a:lnTo>
+                  <a:lnTo>
+                    <a:pt x="5085199" y="604308"/>
+                  </a:lnTo>
+                  <a:lnTo>
+                    <a:pt x="5156821" y="610624"/>
+                  </a:lnTo>
+                  <a:lnTo>
+                    <a:pt x="5228444" y="616891"/>
+                  </a:lnTo>
+                  <a:lnTo>
+                    <a:pt x="5300066" y="623108"/>
+                  </a:lnTo>
+                  <a:lnTo>
+                    <a:pt x="5371689" y="629276"/>
+                  </a:lnTo>
+                  <a:lnTo>
+                    <a:pt x="5443311" y="635395"/>
+                  </a:lnTo>
+                  <a:lnTo>
+                    <a:pt x="5514934" y="641466"/>
+                  </a:lnTo>
+                  <a:lnTo>
+                    <a:pt x="5586557" y="647489"/>
+                  </a:lnTo>
+                  <a:lnTo>
+                    <a:pt x="5658179" y="653465"/>
+                  </a:lnTo>
+                  <a:lnTo>
+                    <a:pt x="5729802" y="659394"/>
+                  </a:lnTo>
+                  <a:lnTo>
+                    <a:pt x="5801424" y="665275"/>
+                  </a:lnTo>
+                  <a:lnTo>
+                    <a:pt x="5873047" y="671111"/>
+                  </a:lnTo>
+                  <a:lnTo>
+                    <a:pt x="5944669" y="676900"/>
+                  </a:lnTo>
+                  <a:lnTo>
+                    <a:pt x="6016292" y="682644"/>
+                  </a:lnTo>
+                  <a:lnTo>
+                    <a:pt x="6087914" y="688342"/>
+                  </a:lnTo>
+                  <a:lnTo>
+                    <a:pt x="6159537" y="693996"/>
+                  </a:lnTo>
+                  <a:lnTo>
+                    <a:pt x="6231159" y="699604"/>
+                  </a:lnTo>
+                  <a:lnTo>
+                    <a:pt x="6302782" y="705169"/>
+                  </a:lnTo>
+                  <a:lnTo>
+                    <a:pt x="6374404" y="710690"/>
+                  </a:lnTo>
+                  <a:lnTo>
+                    <a:pt x="6446027" y="716167"/>
+                  </a:lnTo>
+                  <a:lnTo>
+                    <a:pt x="6517649" y="721601"/>
+                  </a:lnTo>
+                  <a:lnTo>
+                    <a:pt x="6589272" y="726992"/>
+                  </a:lnTo>
+                  <a:lnTo>
+                    <a:pt x="6660894" y="732340"/>
+                  </a:lnTo>
+                  <a:lnTo>
+                    <a:pt x="6732517" y="737647"/>
+                  </a:lnTo>
+                  <a:lnTo>
+                    <a:pt x="6804139" y="742911"/>
+                  </a:lnTo>
+                  <a:lnTo>
+                    <a:pt x="6875762" y="748134"/>
+                  </a:lnTo>
+                  <a:lnTo>
+                    <a:pt x="6947385" y="753316"/>
+                  </a:lnTo>
+                  <a:lnTo>
+                    <a:pt x="7019007" y="758457"/>
+                  </a:lnTo>
+                  <a:lnTo>
+                    <a:pt x="7090630" y="763557"/>
                   </a:lnTo>
                 </a:path>
               </a:pathLst>
@@ -5371,7 +5371,7 @@
                   <a:latin typeface="Helvetica"/>
                   <a:cs typeface="Helvetica"/>
                 </a:rPr>
-                <a:t>subHR per 10 mL/min decline: 1.10 (1.03-1.18), p_Bonf = 0.041 (n = 6)  |  per IQR decline (Δ = 23.3): 1.25 (1.06-1.46)  |  IQR: [-12.8, 10.5]</a:t>
+                <a:t>subHR per 10 mL/min decline: 1.10 (1.03-1.18), p_Bonf = 0.034 (n = 6)  |  per IQR decline (Δ = 23.3): 1.25 (1.07-1.47)  |  IQR: [-12.8, 10.5]</a:t>
               </a:r>
             </a:p>
           </p:txBody>
